--- a/content/docs/theory-analysis/istio-gateway-api/images/images.pptx
+++ b/content/docs/theory-analysis/istio-gateway-api/images/images.pptx
@@ -51389,7 +51389,7 @@
         </p:nvCxnSpPr>
         <p:spPr>
           <a:xfrm>
-            <a:off x="6496305" y="2732921"/>
+            <a:off x="6496305" y="3278557"/>
             <a:ext cx="323569" cy="0"/>
           </a:xfrm>
           <a:prstGeom prst="straightConnector1">
@@ -51433,7 +51433,7 @@
         </p:nvSpPr>
         <p:spPr>
           <a:xfrm>
-            <a:off x="6792048" y="2623151"/>
+            <a:off x="6792048" y="3168787"/>
             <a:ext cx="702455" cy="230832"/>
           </a:xfrm>
           <a:prstGeom prst="rect">
@@ -51471,7 +51471,7 @@
         </p:nvCxnSpPr>
         <p:spPr>
           <a:xfrm>
-            <a:off x="6496305" y="2979561"/>
+            <a:off x="6496305" y="3525197"/>
             <a:ext cx="323569" cy="0"/>
           </a:xfrm>
           <a:prstGeom prst="straightConnector1">
@@ -51515,7 +51515,7 @@
         </p:nvSpPr>
         <p:spPr>
           <a:xfrm>
-            <a:off x="6792048" y="2869791"/>
+            <a:off x="6792048" y="3415427"/>
             <a:ext cx="702455" cy="230832"/>
           </a:xfrm>
           <a:prstGeom prst="rect">
@@ -51992,7 +51992,7 @@
         </p:nvCxnSpPr>
         <p:spPr>
           <a:xfrm>
-            <a:off x="6496305" y="3228227"/>
+            <a:off x="6496305" y="3773863"/>
             <a:ext cx="323569" cy="0"/>
           </a:xfrm>
           <a:prstGeom prst="straightConnector1">
@@ -52036,7 +52036,7 @@
         </p:nvSpPr>
         <p:spPr>
           <a:xfrm>
-            <a:off x="6792048" y="3118457"/>
+            <a:off x="6792048" y="3664093"/>
             <a:ext cx="702455" cy="230832"/>
           </a:xfrm>
           <a:prstGeom prst="rect">
@@ -52631,14 +52631,13 @@
           <p:cNvCxnSpPr>
             <a:cxnSpLocks/>
             <a:stCxn id="76" idx="2"/>
-            <a:endCxn id="9" idx="0"/>
           </p:cNvCxnSpPr>
           <p:nvPr/>
         </p:nvCxnSpPr>
         <p:spPr>
           <a:xfrm>
             <a:off x="3481375" y="995651"/>
-            <a:ext cx="3780035" cy="232415"/>
+            <a:ext cx="3781236" cy="279941"/>
           </a:xfrm>
           <a:prstGeom prst="straightConnector1">
             <a:avLst/>
@@ -52684,8 +52683,8 @@
         </p:nvCxnSpPr>
         <p:spPr>
           <a:xfrm flipH="1">
-            <a:off x="5592488" y="2345666"/>
-            <a:ext cx="1670123" cy="1618111"/>
+            <a:off x="5592488" y="2291160"/>
+            <a:ext cx="1670123" cy="1672617"/>
           </a:xfrm>
           <a:prstGeom prst="straightConnector1">
             <a:avLst/>
@@ -52731,8 +52730,8 @@
         </p:nvCxnSpPr>
         <p:spPr>
           <a:xfrm flipV="1">
-            <a:off x="5592488" y="1709231"/>
-            <a:ext cx="257111" cy="950932"/>
+            <a:off x="5592488" y="1717698"/>
+            <a:ext cx="0" cy="942465"/>
           </a:xfrm>
           <a:prstGeom prst="straightConnector1">
             <a:avLst/>
@@ -52868,14 +52867,15 @@
           </p:cNvPr>
           <p:cNvCxnSpPr>
             <a:cxnSpLocks/>
+            <a:stCxn id="4" idx="2"/>
             <a:endCxn id="159" idx="0"/>
           </p:cNvCxnSpPr>
           <p:nvPr/>
         </p:nvCxnSpPr>
         <p:spPr>
           <a:xfrm flipH="1">
-            <a:off x="4273463" y="2345666"/>
-            <a:ext cx="2989148" cy="1618111"/>
+            <a:off x="4273463" y="2291501"/>
+            <a:ext cx="2989148" cy="1672276"/>
           </a:xfrm>
           <a:prstGeom prst="straightConnector1">
             <a:avLst/>
@@ -53071,6 +53071,52 @@
           <a:ln w="12700">
             <a:solidFill>
               <a:schemeClr val="tx1"/>
+            </a:solidFill>
+            <a:prstDash val="solid"/>
+            <a:headEnd type="none" w="med" len="med"/>
+            <a:tailEnd type="triangle" w="med" len="med"/>
+          </a:ln>
+        </p:spPr>
+        <p:style>
+          <a:lnRef idx="1">
+            <a:schemeClr val="accent1"/>
+          </a:lnRef>
+          <a:fillRef idx="0">
+            <a:schemeClr val="accent1"/>
+          </a:fillRef>
+          <a:effectRef idx="0">
+            <a:schemeClr val="accent1"/>
+          </a:effectRef>
+          <a:fontRef idx="minor">
+            <a:schemeClr val="tx1"/>
+          </a:fontRef>
+        </p:style>
+      </p:cxnSp>
+      <p:cxnSp>
+        <p:nvCxnSpPr>
+          <p:cNvPr id="23" name="직선 화살표 연결선 96">
+            <a:extLst>
+              <a:ext uri="{FF2B5EF4-FFF2-40B4-BE49-F238E27FC236}">
+                <a16:creationId xmlns:a16="http://schemas.microsoft.com/office/drawing/2014/main" id="{1AD9A679-0EDE-7719-78BF-29A4F3B77CE4}"/>
+              </a:ext>
+            </a:extLst>
+          </p:cNvPr>
+          <p:cNvCxnSpPr>
+            <a:cxnSpLocks/>
+          </p:cNvCxnSpPr>
+          <p:nvPr/>
+        </p:nvCxnSpPr>
+        <p:spPr>
+          <a:xfrm>
+            <a:off x="7380312" y="1718380"/>
+            <a:ext cx="0" cy="130333"/>
+          </a:xfrm>
+          <a:prstGeom prst="straightConnector1">
+            <a:avLst/>
+          </a:prstGeom>
+          <a:ln w="12700">
+            <a:solidFill>
+              <a:srgbClr val="C00000"/>
             </a:solidFill>
             <a:prstDash val="solid"/>
             <a:headEnd type="none" w="med" len="med"/>
@@ -54528,14 +54574,14 @@
           <p:cNvCxnSpPr>
             <a:cxnSpLocks/>
             <a:stCxn id="76" idx="2"/>
-            <a:endCxn id="15" idx="0"/>
+            <a:endCxn id="6" idx="0"/>
           </p:cNvCxnSpPr>
           <p:nvPr/>
         </p:nvCxnSpPr>
         <p:spPr>
           <a:xfrm flipH="1">
             <a:off x="2162350" y="995651"/>
-            <a:ext cx="1319025" cy="232415"/>
+            <a:ext cx="1319025" cy="279941"/>
           </a:xfrm>
           <a:prstGeom prst="straightConnector1">
             <a:avLst/>
@@ -54575,15 +54621,15 @@
           </p:cNvPr>
           <p:cNvCxnSpPr>
             <a:cxnSpLocks/>
-            <a:stCxn id="15" idx="2"/>
+            <a:stCxn id="5" idx="2"/>
             <a:endCxn id="159" idx="0"/>
           </p:cNvCxnSpPr>
           <p:nvPr/>
         </p:nvCxnSpPr>
         <p:spPr>
           <a:xfrm>
-            <a:off x="2162350" y="2345666"/>
-            <a:ext cx="2111113" cy="1618111"/>
+            <a:off x="2162350" y="2294444"/>
+            <a:ext cx="2111113" cy="1669333"/>
           </a:xfrm>
           <a:prstGeom prst="straightConnector1">
             <a:avLst/>
@@ -54623,15 +54669,15 @@
           </p:cNvPr>
           <p:cNvCxnSpPr>
             <a:cxnSpLocks/>
-            <a:stCxn id="15" idx="2"/>
+            <a:stCxn id="5" idx="2"/>
             <a:endCxn id="160" idx="0"/>
           </p:cNvCxnSpPr>
           <p:nvPr/>
         </p:nvCxnSpPr>
         <p:spPr>
           <a:xfrm>
-            <a:off x="2162350" y="2345666"/>
-            <a:ext cx="3430138" cy="1618111"/>
+            <a:off x="2162350" y="2294444"/>
+            <a:ext cx="3430138" cy="1669333"/>
           </a:xfrm>
           <a:prstGeom prst="straightConnector1">
             <a:avLst/>
@@ -54925,6 +54971,52 @@
           <a:ln w="12700">
             <a:solidFill>
               <a:schemeClr val="tx1"/>
+            </a:solidFill>
+            <a:prstDash val="solid"/>
+            <a:headEnd type="none" w="med" len="med"/>
+            <a:tailEnd type="triangle" w="med" len="med"/>
+          </a:ln>
+        </p:spPr>
+        <p:style>
+          <a:lnRef idx="1">
+            <a:schemeClr val="accent1"/>
+          </a:lnRef>
+          <a:fillRef idx="0">
+            <a:schemeClr val="accent1"/>
+          </a:fillRef>
+          <a:effectRef idx="0">
+            <a:schemeClr val="accent1"/>
+          </a:effectRef>
+          <a:fontRef idx="minor">
+            <a:schemeClr val="tx1"/>
+          </a:fontRef>
+        </p:style>
+      </p:cxnSp>
+      <p:cxnSp>
+        <p:nvCxnSpPr>
+          <p:cNvPr id="13" name="직선 화살표 연결선 96">
+            <a:extLst>
+              <a:ext uri="{FF2B5EF4-FFF2-40B4-BE49-F238E27FC236}">
+                <a16:creationId xmlns:a16="http://schemas.microsoft.com/office/drawing/2014/main" id="{DC067B9A-12EC-7B20-0194-5076370F62E4}"/>
+              </a:ext>
+            </a:extLst>
+          </p:cNvPr>
+          <p:cNvCxnSpPr>
+            <a:cxnSpLocks/>
+          </p:cNvCxnSpPr>
+          <p:nvPr/>
+        </p:nvCxnSpPr>
+        <p:spPr>
+          <a:xfrm>
+            <a:off x="2051720" y="1718380"/>
+            <a:ext cx="0" cy="133276"/>
+          </a:xfrm>
+          <a:prstGeom prst="straightConnector1">
+            <a:avLst/>
+          </a:prstGeom>
+          <a:ln w="12700">
+            <a:solidFill>
+              <a:srgbClr val="C00000"/>
             </a:solidFill>
             <a:prstDash val="solid"/>
             <a:headEnd type="none" w="med" len="med"/>

--- a/content/docs/theory-analysis/istio-gateway-api/images/images.pptx
+++ b/content/docs/theory-analysis/istio-gateway-api/images/images.pptx
@@ -236,7 +236,7 @@
           <a:p>
             <a:fld id="{6CD5550B-26C4-49A9-A5BA-636EF7BE6CE9}" type="datetimeFigureOut">
               <a:rPr lang="ko-KR" altLang="en-US" smtClean="0"/>
-              <a:t>2026. 10. 7.</a:t>
+              <a:t>2026. 10. 8.</a:t>
             </a:fld>
             <a:endParaRPr lang="ko-KR" altLang="en-US"/>
           </a:p>
@@ -1954,7 +1954,7 @@
           <a:p>
             <a:fld id="{FB30EDBD-1C2D-4C1E-B459-B60219FAB484}" type="datetimeFigureOut">
               <a:rPr lang="ko-KR" altLang="en-US" smtClean="0"/>
-              <a:t>2026. 10. 7.</a:t>
+              <a:t>2026. 10. 8.</a:t>
             </a:fld>
             <a:endParaRPr lang="ko-KR" altLang="en-US"/>
           </a:p>
@@ -2117,7 +2117,7 @@
           <a:p>
             <a:fld id="{FB30EDBD-1C2D-4C1E-B459-B60219FAB484}" type="datetimeFigureOut">
               <a:rPr lang="ko-KR" altLang="en-US" smtClean="0"/>
-              <a:t>2026. 10. 7.</a:t>
+              <a:t>2026. 10. 8.</a:t>
             </a:fld>
             <a:endParaRPr lang="ko-KR" altLang="en-US"/>
           </a:p>
@@ -2290,7 +2290,7 @@
           <a:p>
             <a:fld id="{FB30EDBD-1C2D-4C1E-B459-B60219FAB484}" type="datetimeFigureOut">
               <a:rPr lang="ko-KR" altLang="en-US" smtClean="0"/>
-              <a:t>2026. 10. 7.</a:t>
+              <a:t>2026. 10. 8.</a:t>
             </a:fld>
             <a:endParaRPr lang="ko-KR" altLang="en-US"/>
           </a:p>
@@ -2453,7 +2453,7 @@
           <a:p>
             <a:fld id="{FB30EDBD-1C2D-4C1E-B459-B60219FAB484}" type="datetimeFigureOut">
               <a:rPr lang="ko-KR" altLang="en-US" smtClean="0"/>
-              <a:t>2026. 10. 7.</a:t>
+              <a:t>2026. 10. 8.</a:t>
             </a:fld>
             <a:endParaRPr lang="ko-KR" altLang="en-US"/>
           </a:p>
@@ -2693,7 +2693,7 @@
           <a:p>
             <a:fld id="{FB30EDBD-1C2D-4C1E-B459-B60219FAB484}" type="datetimeFigureOut">
               <a:rPr lang="ko-KR" altLang="en-US" smtClean="0"/>
-              <a:t>2026. 10. 7.</a:t>
+              <a:t>2026. 10. 8.</a:t>
             </a:fld>
             <a:endParaRPr lang="ko-KR" altLang="en-US"/>
           </a:p>
@@ -2973,7 +2973,7 @@
           <a:p>
             <a:fld id="{FB30EDBD-1C2D-4C1E-B459-B60219FAB484}" type="datetimeFigureOut">
               <a:rPr lang="ko-KR" altLang="en-US" smtClean="0"/>
-              <a:t>2026. 10. 7.</a:t>
+              <a:t>2026. 10. 8.</a:t>
             </a:fld>
             <a:endParaRPr lang="ko-KR" altLang="en-US"/>
           </a:p>
@@ -3387,7 +3387,7 @@
           <a:p>
             <a:fld id="{FB30EDBD-1C2D-4C1E-B459-B60219FAB484}" type="datetimeFigureOut">
               <a:rPr lang="ko-KR" altLang="en-US" smtClean="0"/>
-              <a:t>2026. 10. 7.</a:t>
+              <a:t>2026. 10. 8.</a:t>
             </a:fld>
             <a:endParaRPr lang="ko-KR" altLang="en-US"/>
           </a:p>
@@ -3499,7 +3499,7 @@
           <a:p>
             <a:fld id="{FB30EDBD-1C2D-4C1E-B459-B60219FAB484}" type="datetimeFigureOut">
               <a:rPr lang="ko-KR" altLang="en-US" smtClean="0"/>
-              <a:t>2026. 10. 7.</a:t>
+              <a:t>2026. 10. 8.</a:t>
             </a:fld>
             <a:endParaRPr lang="ko-KR" altLang="en-US"/>
           </a:p>
@@ -3589,7 +3589,7 @@
           <a:p>
             <a:fld id="{FB30EDBD-1C2D-4C1E-B459-B60219FAB484}" type="datetimeFigureOut">
               <a:rPr lang="ko-KR" altLang="en-US" smtClean="0"/>
-              <a:t>2026. 10. 7.</a:t>
+              <a:t>2026. 10. 8.</a:t>
             </a:fld>
             <a:endParaRPr lang="ko-KR" altLang="en-US"/>
           </a:p>
@@ -3859,7 +3859,7 @@
           <a:p>
             <a:fld id="{FB30EDBD-1C2D-4C1E-B459-B60219FAB484}" type="datetimeFigureOut">
               <a:rPr lang="ko-KR" altLang="en-US" smtClean="0"/>
-              <a:t>2026. 10. 7.</a:t>
+              <a:t>2026. 10. 8.</a:t>
             </a:fld>
             <a:endParaRPr lang="ko-KR" altLang="en-US"/>
           </a:p>
@@ -4106,7 +4106,7 @@
           <a:p>
             <a:fld id="{FB30EDBD-1C2D-4C1E-B459-B60219FAB484}" type="datetimeFigureOut">
               <a:rPr lang="ko-KR" altLang="en-US" smtClean="0"/>
-              <a:t>2026. 10. 7.</a:t>
+              <a:t>2026. 10. 8.</a:t>
             </a:fld>
             <a:endParaRPr lang="ko-KR" altLang="en-US"/>
           </a:p>
@@ -4312,7 +4312,7 @@
           <a:p>
             <a:fld id="{FB30EDBD-1C2D-4C1E-B459-B60219FAB484}" type="datetimeFigureOut">
               <a:rPr lang="ko-KR" altLang="en-US" smtClean="0"/>
-              <a:t>2026. 10. 7.</a:t>
+              <a:t>2026. 10. 8.</a:t>
             </a:fld>
             <a:endParaRPr lang="ko-KR" altLang="en-US"/>
           </a:p>
@@ -33113,170 +33113,6 @@
           </a:p>
         </p:txBody>
       </p:sp>
-      <p:cxnSp>
-        <p:nvCxnSpPr>
-          <p:cNvPr id="151" name="직선 화살표 연결선 96">
-            <a:extLst>
-              <a:ext uri="{FF2B5EF4-FFF2-40B4-BE49-F238E27FC236}">
-                <a16:creationId xmlns:a16="http://schemas.microsoft.com/office/drawing/2014/main" id="{CEA25FE5-1DA9-7255-2EF4-E1FEAD9529C2}"/>
-              </a:ext>
-            </a:extLst>
-          </p:cNvPr>
-          <p:cNvCxnSpPr>
-            <a:cxnSpLocks/>
-          </p:cNvCxnSpPr>
-          <p:nvPr/>
-        </p:nvCxnSpPr>
-        <p:spPr>
-          <a:xfrm>
-            <a:off x="6496305" y="2732921"/>
-            <a:ext cx="323569" cy="0"/>
-          </a:xfrm>
-          <a:prstGeom prst="straightConnector1">
-            <a:avLst/>
-          </a:prstGeom>
-          <a:ln w="12700">
-            <a:solidFill>
-              <a:schemeClr val="tx1"/>
-            </a:solidFill>
-            <a:prstDash val="solid"/>
-            <a:headEnd type="none" w="med" len="med"/>
-            <a:tailEnd type="triangle" w="med" len="med"/>
-          </a:ln>
-        </p:spPr>
-        <p:style>
-          <a:lnRef idx="1">
-            <a:schemeClr val="accent1"/>
-          </a:lnRef>
-          <a:fillRef idx="0">
-            <a:schemeClr val="accent1"/>
-          </a:fillRef>
-          <a:effectRef idx="0">
-            <a:schemeClr val="accent1"/>
-          </a:effectRef>
-          <a:fontRef idx="minor">
-            <a:schemeClr val="tx1"/>
-          </a:fontRef>
-        </p:style>
-      </p:cxnSp>
-      <p:sp>
-        <p:nvSpPr>
-          <p:cNvPr id="152" name="TextBox 151">
-            <a:extLst>
-              <a:ext uri="{FF2B5EF4-FFF2-40B4-BE49-F238E27FC236}">
-                <a16:creationId xmlns:a16="http://schemas.microsoft.com/office/drawing/2014/main" id="{DEC98292-6C87-1583-80E8-6C4CE7048E0B}"/>
-              </a:ext>
-            </a:extLst>
-          </p:cNvPr>
-          <p:cNvSpPr txBox="1"/>
-          <p:nvPr/>
-        </p:nvSpPr>
-        <p:spPr>
-          <a:xfrm>
-            <a:off x="6792048" y="2623151"/>
-            <a:ext cx="702455" cy="230832"/>
-          </a:xfrm>
-          <a:prstGeom prst="rect">
-            <a:avLst/>
-          </a:prstGeom>
-          <a:noFill/>
-        </p:spPr>
-        <p:txBody>
-          <a:bodyPr wrap="square" rtlCol="0">
-            <a:spAutoFit/>
-          </a:bodyPr>
-          <a:lstStyle/>
-          <a:p>
-            <a:r>
-              <a:rPr lang="en-US" sz="900"/>
-              <a:t>Reference</a:t>
-            </a:r>
-            <a:endParaRPr lang="en-KR" sz="900"/>
-          </a:p>
-        </p:txBody>
-      </p:sp>
-      <p:cxnSp>
-        <p:nvCxnSpPr>
-          <p:cNvPr id="153" name="직선 화살표 연결선 96">
-            <a:extLst>
-              <a:ext uri="{FF2B5EF4-FFF2-40B4-BE49-F238E27FC236}">
-                <a16:creationId xmlns:a16="http://schemas.microsoft.com/office/drawing/2014/main" id="{85E36BDC-54C5-201A-2625-FF796BB3807F}"/>
-              </a:ext>
-            </a:extLst>
-          </p:cNvPr>
-          <p:cNvCxnSpPr>
-            <a:cxnSpLocks/>
-          </p:cNvCxnSpPr>
-          <p:nvPr/>
-        </p:nvCxnSpPr>
-        <p:spPr>
-          <a:xfrm>
-            <a:off x="6496305" y="2979561"/>
-            <a:ext cx="323569" cy="0"/>
-          </a:xfrm>
-          <a:prstGeom prst="straightConnector1">
-            <a:avLst/>
-          </a:prstGeom>
-          <a:ln w="12700">
-            <a:solidFill>
-              <a:srgbClr val="C00000"/>
-            </a:solidFill>
-            <a:prstDash val="solid"/>
-            <a:headEnd type="none" w="med" len="med"/>
-            <a:tailEnd type="triangle" w="med" len="med"/>
-          </a:ln>
-        </p:spPr>
-        <p:style>
-          <a:lnRef idx="1">
-            <a:schemeClr val="accent1"/>
-          </a:lnRef>
-          <a:fillRef idx="0">
-            <a:schemeClr val="accent1"/>
-          </a:fillRef>
-          <a:effectRef idx="0">
-            <a:schemeClr val="accent1"/>
-          </a:effectRef>
-          <a:fontRef idx="minor">
-            <a:schemeClr val="tx1"/>
-          </a:fontRef>
-        </p:style>
-      </p:cxnSp>
-      <p:sp>
-        <p:nvSpPr>
-          <p:cNvPr id="154" name="TextBox 153">
-            <a:extLst>
-              <a:ext uri="{FF2B5EF4-FFF2-40B4-BE49-F238E27FC236}">
-                <a16:creationId xmlns:a16="http://schemas.microsoft.com/office/drawing/2014/main" id="{E63877EB-979F-BE99-E108-68F5A48A892A}"/>
-              </a:ext>
-            </a:extLst>
-          </p:cNvPr>
-          <p:cNvSpPr txBox="1"/>
-          <p:nvPr/>
-        </p:nvSpPr>
-        <p:spPr>
-          <a:xfrm>
-            <a:off x="6792048" y="2869791"/>
-            <a:ext cx="702455" cy="230832"/>
-          </a:xfrm>
-          <a:prstGeom prst="rect">
-            <a:avLst/>
-          </a:prstGeom>
-          <a:noFill/>
-        </p:spPr>
-        <p:txBody>
-          <a:bodyPr wrap="square" rtlCol="0">
-            <a:spAutoFit/>
-          </a:bodyPr>
-          <a:lstStyle/>
-          <a:p>
-            <a:r>
-              <a:rPr lang="en-US" sz="900"/>
-              <a:t>Traffic</a:t>
-            </a:r>
-            <a:endParaRPr lang="en-KR" sz="900"/>
-          </a:p>
-        </p:txBody>
-      </p:sp>
       <p:sp>
         <p:nvSpPr>
           <p:cNvPr id="155" name="사각형: 둥근 모서리 70">
@@ -33713,88 +33549,6 @@
               <a:t>Pod</a:t>
             </a:r>
             <a:endParaRPr lang="ko-KR" altLang="en-US" sz="900" b="1" dirty="0"/>
-          </a:p>
-        </p:txBody>
-      </p:sp>
-      <p:cxnSp>
-        <p:nvCxnSpPr>
-          <p:cNvPr id="168" name="직선 화살표 연결선 96">
-            <a:extLst>
-              <a:ext uri="{FF2B5EF4-FFF2-40B4-BE49-F238E27FC236}">
-                <a16:creationId xmlns:a16="http://schemas.microsoft.com/office/drawing/2014/main" id="{D563C09B-3E56-66AD-41F0-0A3B4E752773}"/>
-              </a:ext>
-            </a:extLst>
-          </p:cNvPr>
-          <p:cNvCxnSpPr>
-            <a:cxnSpLocks/>
-          </p:cNvCxnSpPr>
-          <p:nvPr/>
-        </p:nvCxnSpPr>
-        <p:spPr>
-          <a:xfrm>
-            <a:off x="6496305" y="3228227"/>
-            <a:ext cx="323569" cy="0"/>
-          </a:xfrm>
-          <a:prstGeom prst="straightConnector1">
-            <a:avLst/>
-          </a:prstGeom>
-          <a:ln w="12700">
-            <a:solidFill>
-              <a:schemeClr val="accent3"/>
-            </a:solidFill>
-            <a:prstDash val="solid"/>
-            <a:headEnd type="none" w="med" len="med"/>
-            <a:tailEnd type="triangle" w="med" len="med"/>
-          </a:ln>
-        </p:spPr>
-        <p:style>
-          <a:lnRef idx="1">
-            <a:schemeClr val="accent1"/>
-          </a:lnRef>
-          <a:fillRef idx="0">
-            <a:schemeClr val="accent1"/>
-          </a:fillRef>
-          <a:effectRef idx="0">
-            <a:schemeClr val="accent1"/>
-          </a:effectRef>
-          <a:fontRef idx="minor">
-            <a:schemeClr val="tx1"/>
-          </a:fontRef>
-        </p:style>
-      </p:cxnSp>
-      <p:sp>
-        <p:nvSpPr>
-          <p:cNvPr id="169" name="TextBox 168">
-            <a:extLst>
-              <a:ext uri="{FF2B5EF4-FFF2-40B4-BE49-F238E27FC236}">
-                <a16:creationId xmlns:a16="http://schemas.microsoft.com/office/drawing/2014/main" id="{5978CC67-A5C6-1B75-807E-212B7F6C7B41}"/>
-              </a:ext>
-            </a:extLst>
-          </p:cNvPr>
-          <p:cNvSpPr txBox="1"/>
-          <p:nvPr/>
-        </p:nvSpPr>
-        <p:spPr>
-          <a:xfrm>
-            <a:off x="6792048" y="3118457"/>
-            <a:ext cx="702455" cy="230832"/>
-          </a:xfrm>
-          <a:prstGeom prst="rect">
-            <a:avLst/>
-          </a:prstGeom>
-          <a:noFill/>
-        </p:spPr>
-        <p:txBody>
-          <a:bodyPr wrap="square" rtlCol="0">
-            <a:spAutoFit/>
-          </a:bodyPr>
-          <a:lstStyle/>
-          <a:p>
-            <a:r>
-              <a:rPr lang="en-US" sz="900"/>
-              <a:t>Create</a:t>
-            </a:r>
-            <a:endParaRPr lang="en-KR" sz="900"/>
           </a:p>
         </p:txBody>
       </p:sp>
@@ -33942,6 +33696,252 @@
           </a:fontRef>
         </p:style>
       </p:cxnSp>
+      <p:cxnSp>
+        <p:nvCxnSpPr>
+          <p:cNvPr id="2" name="직선 화살표 연결선 96">
+            <a:extLst>
+              <a:ext uri="{FF2B5EF4-FFF2-40B4-BE49-F238E27FC236}">
+                <a16:creationId xmlns:a16="http://schemas.microsoft.com/office/drawing/2014/main" id="{F748ADD7-676B-B058-7B79-A31443F399B7}"/>
+              </a:ext>
+            </a:extLst>
+          </p:cNvPr>
+          <p:cNvCxnSpPr>
+            <a:cxnSpLocks/>
+          </p:cNvCxnSpPr>
+          <p:nvPr/>
+        </p:nvCxnSpPr>
+        <p:spPr>
+          <a:xfrm>
+            <a:off x="6496305" y="3278557"/>
+            <a:ext cx="323569" cy="0"/>
+          </a:xfrm>
+          <a:prstGeom prst="straightConnector1">
+            <a:avLst/>
+          </a:prstGeom>
+          <a:ln w="12700">
+            <a:solidFill>
+              <a:schemeClr val="tx1"/>
+            </a:solidFill>
+            <a:prstDash val="solid"/>
+            <a:headEnd type="none" w="med" len="med"/>
+            <a:tailEnd type="triangle" w="med" len="med"/>
+          </a:ln>
+        </p:spPr>
+        <p:style>
+          <a:lnRef idx="1">
+            <a:schemeClr val="accent1"/>
+          </a:lnRef>
+          <a:fillRef idx="0">
+            <a:schemeClr val="accent1"/>
+          </a:fillRef>
+          <a:effectRef idx="0">
+            <a:schemeClr val="accent1"/>
+          </a:effectRef>
+          <a:fontRef idx="minor">
+            <a:schemeClr val="tx1"/>
+          </a:fontRef>
+        </p:style>
+      </p:cxnSp>
+      <p:sp>
+        <p:nvSpPr>
+          <p:cNvPr id="4" name="TextBox 3">
+            <a:extLst>
+              <a:ext uri="{FF2B5EF4-FFF2-40B4-BE49-F238E27FC236}">
+                <a16:creationId xmlns:a16="http://schemas.microsoft.com/office/drawing/2014/main" id="{942AF2C3-1893-649B-F0A4-D1A9BD0F1346}"/>
+              </a:ext>
+            </a:extLst>
+          </p:cNvPr>
+          <p:cNvSpPr txBox="1"/>
+          <p:nvPr/>
+        </p:nvSpPr>
+        <p:spPr>
+          <a:xfrm>
+            <a:off x="6792048" y="3168787"/>
+            <a:ext cx="702455" cy="230832"/>
+          </a:xfrm>
+          <a:prstGeom prst="rect">
+            <a:avLst/>
+          </a:prstGeom>
+          <a:noFill/>
+        </p:spPr>
+        <p:txBody>
+          <a:bodyPr wrap="square" rtlCol="0">
+            <a:spAutoFit/>
+          </a:bodyPr>
+          <a:lstStyle/>
+          <a:p>
+            <a:r>
+              <a:rPr lang="en-US" altLang="ko-KR" sz="900"/>
+              <a:t>Reference</a:t>
+            </a:r>
+            <a:endParaRPr lang="en-KR" sz="900"/>
+          </a:p>
+        </p:txBody>
+      </p:sp>
+      <p:cxnSp>
+        <p:nvCxnSpPr>
+          <p:cNvPr id="9" name="직선 화살표 연결선 96">
+            <a:extLst>
+              <a:ext uri="{FF2B5EF4-FFF2-40B4-BE49-F238E27FC236}">
+                <a16:creationId xmlns:a16="http://schemas.microsoft.com/office/drawing/2014/main" id="{48AA806A-7A8B-28B8-7FF8-B90B1D23C0DA}"/>
+              </a:ext>
+            </a:extLst>
+          </p:cNvPr>
+          <p:cNvCxnSpPr>
+            <a:cxnSpLocks/>
+          </p:cNvCxnSpPr>
+          <p:nvPr/>
+        </p:nvCxnSpPr>
+        <p:spPr>
+          <a:xfrm>
+            <a:off x="6496305" y="3525197"/>
+            <a:ext cx="323569" cy="0"/>
+          </a:xfrm>
+          <a:prstGeom prst="straightConnector1">
+            <a:avLst/>
+          </a:prstGeom>
+          <a:ln w="12700">
+            <a:solidFill>
+              <a:srgbClr val="C00000"/>
+            </a:solidFill>
+            <a:prstDash val="solid"/>
+            <a:headEnd type="none" w="med" len="med"/>
+            <a:tailEnd type="triangle" w="med" len="med"/>
+          </a:ln>
+        </p:spPr>
+        <p:style>
+          <a:lnRef idx="1">
+            <a:schemeClr val="accent1"/>
+          </a:lnRef>
+          <a:fillRef idx="0">
+            <a:schemeClr val="accent1"/>
+          </a:fillRef>
+          <a:effectRef idx="0">
+            <a:schemeClr val="accent1"/>
+          </a:effectRef>
+          <a:fontRef idx="minor">
+            <a:schemeClr val="tx1"/>
+          </a:fontRef>
+        </p:style>
+      </p:cxnSp>
+      <p:sp>
+        <p:nvSpPr>
+          <p:cNvPr id="10" name="TextBox 9">
+            <a:extLst>
+              <a:ext uri="{FF2B5EF4-FFF2-40B4-BE49-F238E27FC236}">
+                <a16:creationId xmlns:a16="http://schemas.microsoft.com/office/drawing/2014/main" id="{4B63BA05-1821-2693-8000-22EACB7873F3}"/>
+              </a:ext>
+            </a:extLst>
+          </p:cNvPr>
+          <p:cNvSpPr txBox="1"/>
+          <p:nvPr/>
+        </p:nvSpPr>
+        <p:spPr>
+          <a:xfrm>
+            <a:off x="6792048" y="3415427"/>
+            <a:ext cx="702455" cy="230832"/>
+          </a:xfrm>
+          <a:prstGeom prst="rect">
+            <a:avLst/>
+          </a:prstGeom>
+          <a:noFill/>
+        </p:spPr>
+        <p:txBody>
+          <a:bodyPr wrap="square" rtlCol="0">
+            <a:spAutoFit/>
+          </a:bodyPr>
+          <a:lstStyle/>
+          <a:p>
+            <a:r>
+              <a:rPr lang="en-US" sz="900"/>
+              <a:t>Traffic</a:t>
+            </a:r>
+            <a:endParaRPr lang="en-KR" sz="900"/>
+          </a:p>
+        </p:txBody>
+      </p:sp>
+      <p:cxnSp>
+        <p:nvCxnSpPr>
+          <p:cNvPr id="11" name="직선 화살표 연결선 96">
+            <a:extLst>
+              <a:ext uri="{FF2B5EF4-FFF2-40B4-BE49-F238E27FC236}">
+                <a16:creationId xmlns:a16="http://schemas.microsoft.com/office/drawing/2014/main" id="{B0617DC1-FDCC-E4C9-8A5B-CCC75ADD1665}"/>
+              </a:ext>
+            </a:extLst>
+          </p:cNvPr>
+          <p:cNvCxnSpPr>
+            <a:cxnSpLocks/>
+          </p:cNvCxnSpPr>
+          <p:nvPr/>
+        </p:nvCxnSpPr>
+        <p:spPr>
+          <a:xfrm>
+            <a:off x="6496305" y="3773863"/>
+            <a:ext cx="323569" cy="0"/>
+          </a:xfrm>
+          <a:prstGeom prst="straightConnector1">
+            <a:avLst/>
+          </a:prstGeom>
+          <a:ln w="12700">
+            <a:solidFill>
+              <a:schemeClr val="accent3"/>
+            </a:solidFill>
+            <a:prstDash val="solid"/>
+            <a:headEnd type="none" w="med" len="med"/>
+            <a:tailEnd type="triangle" w="med" len="med"/>
+          </a:ln>
+        </p:spPr>
+        <p:style>
+          <a:lnRef idx="1">
+            <a:schemeClr val="accent1"/>
+          </a:lnRef>
+          <a:fillRef idx="0">
+            <a:schemeClr val="accent1"/>
+          </a:fillRef>
+          <a:effectRef idx="0">
+            <a:schemeClr val="accent1"/>
+          </a:effectRef>
+          <a:fontRef idx="minor">
+            <a:schemeClr val="tx1"/>
+          </a:fontRef>
+        </p:style>
+      </p:cxnSp>
+      <p:sp>
+        <p:nvSpPr>
+          <p:cNvPr id="12" name="TextBox 11">
+            <a:extLst>
+              <a:ext uri="{FF2B5EF4-FFF2-40B4-BE49-F238E27FC236}">
+                <a16:creationId xmlns:a16="http://schemas.microsoft.com/office/drawing/2014/main" id="{2ABF0294-85E8-CF40-1184-163E763E3C3E}"/>
+              </a:ext>
+            </a:extLst>
+          </p:cNvPr>
+          <p:cNvSpPr txBox="1"/>
+          <p:nvPr/>
+        </p:nvSpPr>
+        <p:spPr>
+          <a:xfrm>
+            <a:off x="6792048" y="3664093"/>
+            <a:ext cx="702455" cy="230832"/>
+          </a:xfrm>
+          <a:prstGeom prst="rect">
+            <a:avLst/>
+          </a:prstGeom>
+          <a:noFill/>
+        </p:spPr>
+        <p:txBody>
+          <a:bodyPr wrap="square" rtlCol="0">
+            <a:spAutoFit/>
+          </a:bodyPr>
+          <a:lstStyle/>
+          <a:p>
+            <a:r>
+              <a:rPr lang="en-US" sz="900"/>
+              <a:t>Create</a:t>
+            </a:r>
+            <a:endParaRPr lang="en-KR" sz="900"/>
+          </a:p>
+        </p:txBody>
+      </p:sp>
     </p:spTree>
     <p:extLst>
       <p:ext uri="{BB962C8B-B14F-4D97-AF65-F5344CB8AC3E}">
@@ -47887,170 +47887,6 @@
           </a:p>
         </p:txBody>
       </p:sp>
-      <p:cxnSp>
-        <p:nvCxnSpPr>
-          <p:cNvPr id="151" name="직선 화살표 연결선 96">
-            <a:extLst>
-              <a:ext uri="{FF2B5EF4-FFF2-40B4-BE49-F238E27FC236}">
-                <a16:creationId xmlns:a16="http://schemas.microsoft.com/office/drawing/2014/main" id="{09B2044B-3244-14A3-4CB3-758D4BE186A1}"/>
-              </a:ext>
-            </a:extLst>
-          </p:cNvPr>
-          <p:cNvCxnSpPr>
-            <a:cxnSpLocks/>
-          </p:cNvCxnSpPr>
-          <p:nvPr/>
-        </p:nvCxnSpPr>
-        <p:spPr>
-          <a:xfrm>
-            <a:off x="6496305" y="2732921"/>
-            <a:ext cx="323569" cy="0"/>
-          </a:xfrm>
-          <a:prstGeom prst="straightConnector1">
-            <a:avLst/>
-          </a:prstGeom>
-          <a:ln w="12700">
-            <a:solidFill>
-              <a:schemeClr val="tx1"/>
-            </a:solidFill>
-            <a:prstDash val="solid"/>
-            <a:headEnd type="none" w="med" len="med"/>
-            <a:tailEnd type="triangle" w="med" len="med"/>
-          </a:ln>
-        </p:spPr>
-        <p:style>
-          <a:lnRef idx="1">
-            <a:schemeClr val="accent1"/>
-          </a:lnRef>
-          <a:fillRef idx="0">
-            <a:schemeClr val="accent1"/>
-          </a:fillRef>
-          <a:effectRef idx="0">
-            <a:schemeClr val="accent1"/>
-          </a:effectRef>
-          <a:fontRef idx="minor">
-            <a:schemeClr val="tx1"/>
-          </a:fontRef>
-        </p:style>
-      </p:cxnSp>
-      <p:sp>
-        <p:nvSpPr>
-          <p:cNvPr id="152" name="TextBox 151">
-            <a:extLst>
-              <a:ext uri="{FF2B5EF4-FFF2-40B4-BE49-F238E27FC236}">
-                <a16:creationId xmlns:a16="http://schemas.microsoft.com/office/drawing/2014/main" id="{F6815448-DB17-DA0F-7841-D21D54E264B0}"/>
-              </a:ext>
-            </a:extLst>
-          </p:cNvPr>
-          <p:cNvSpPr txBox="1"/>
-          <p:nvPr/>
-        </p:nvSpPr>
-        <p:spPr>
-          <a:xfrm>
-            <a:off x="6792048" y="2623151"/>
-            <a:ext cx="702455" cy="230832"/>
-          </a:xfrm>
-          <a:prstGeom prst="rect">
-            <a:avLst/>
-          </a:prstGeom>
-          <a:noFill/>
-        </p:spPr>
-        <p:txBody>
-          <a:bodyPr wrap="square" rtlCol="0">
-            <a:spAutoFit/>
-          </a:bodyPr>
-          <a:lstStyle/>
-          <a:p>
-            <a:r>
-              <a:rPr lang="en-US" altLang="ko-KR" sz="900"/>
-              <a:t>Reference</a:t>
-            </a:r>
-            <a:endParaRPr lang="en-KR" sz="900"/>
-          </a:p>
-        </p:txBody>
-      </p:sp>
-      <p:cxnSp>
-        <p:nvCxnSpPr>
-          <p:cNvPr id="153" name="직선 화살표 연결선 96">
-            <a:extLst>
-              <a:ext uri="{FF2B5EF4-FFF2-40B4-BE49-F238E27FC236}">
-                <a16:creationId xmlns:a16="http://schemas.microsoft.com/office/drawing/2014/main" id="{46BC52B4-119C-F1FD-93C9-87DC09B288E8}"/>
-              </a:ext>
-            </a:extLst>
-          </p:cNvPr>
-          <p:cNvCxnSpPr>
-            <a:cxnSpLocks/>
-          </p:cNvCxnSpPr>
-          <p:nvPr/>
-        </p:nvCxnSpPr>
-        <p:spPr>
-          <a:xfrm>
-            <a:off x="6496305" y="2979561"/>
-            <a:ext cx="323569" cy="0"/>
-          </a:xfrm>
-          <a:prstGeom prst="straightConnector1">
-            <a:avLst/>
-          </a:prstGeom>
-          <a:ln w="12700">
-            <a:solidFill>
-              <a:srgbClr val="C00000"/>
-            </a:solidFill>
-            <a:prstDash val="solid"/>
-            <a:headEnd type="none" w="med" len="med"/>
-            <a:tailEnd type="triangle" w="med" len="med"/>
-          </a:ln>
-        </p:spPr>
-        <p:style>
-          <a:lnRef idx="1">
-            <a:schemeClr val="accent1"/>
-          </a:lnRef>
-          <a:fillRef idx="0">
-            <a:schemeClr val="accent1"/>
-          </a:fillRef>
-          <a:effectRef idx="0">
-            <a:schemeClr val="accent1"/>
-          </a:effectRef>
-          <a:fontRef idx="minor">
-            <a:schemeClr val="tx1"/>
-          </a:fontRef>
-        </p:style>
-      </p:cxnSp>
-      <p:sp>
-        <p:nvSpPr>
-          <p:cNvPr id="154" name="TextBox 153">
-            <a:extLst>
-              <a:ext uri="{FF2B5EF4-FFF2-40B4-BE49-F238E27FC236}">
-                <a16:creationId xmlns:a16="http://schemas.microsoft.com/office/drawing/2014/main" id="{BD31C6ED-FD0C-E9C3-3480-53641DF9FEDC}"/>
-              </a:ext>
-            </a:extLst>
-          </p:cNvPr>
-          <p:cNvSpPr txBox="1"/>
-          <p:nvPr/>
-        </p:nvSpPr>
-        <p:spPr>
-          <a:xfrm>
-            <a:off x="6792048" y="2869791"/>
-            <a:ext cx="702455" cy="230832"/>
-          </a:xfrm>
-          <a:prstGeom prst="rect">
-            <a:avLst/>
-          </a:prstGeom>
-          <a:noFill/>
-        </p:spPr>
-        <p:txBody>
-          <a:bodyPr wrap="square" rtlCol="0">
-            <a:spAutoFit/>
-          </a:bodyPr>
-          <a:lstStyle/>
-          <a:p>
-            <a:r>
-              <a:rPr lang="en-US" sz="900"/>
-              <a:t>Traffic</a:t>
-            </a:r>
-            <a:endParaRPr lang="en-KR" sz="900"/>
-          </a:p>
-        </p:txBody>
-      </p:sp>
       <p:sp>
         <p:nvSpPr>
           <p:cNvPr id="155" name="사각형: 둥근 모서리 70">
@@ -48490,88 +48326,6 @@
           </a:p>
         </p:txBody>
       </p:sp>
-      <p:cxnSp>
-        <p:nvCxnSpPr>
-          <p:cNvPr id="168" name="직선 화살표 연결선 96">
-            <a:extLst>
-              <a:ext uri="{FF2B5EF4-FFF2-40B4-BE49-F238E27FC236}">
-                <a16:creationId xmlns:a16="http://schemas.microsoft.com/office/drawing/2014/main" id="{7EBF1FAF-9FD1-B490-4C88-7516DD78BA48}"/>
-              </a:ext>
-            </a:extLst>
-          </p:cNvPr>
-          <p:cNvCxnSpPr>
-            <a:cxnSpLocks/>
-          </p:cNvCxnSpPr>
-          <p:nvPr/>
-        </p:nvCxnSpPr>
-        <p:spPr>
-          <a:xfrm>
-            <a:off x="6496305" y="3228227"/>
-            <a:ext cx="323569" cy="0"/>
-          </a:xfrm>
-          <a:prstGeom prst="straightConnector1">
-            <a:avLst/>
-          </a:prstGeom>
-          <a:ln w="12700">
-            <a:solidFill>
-              <a:schemeClr val="accent3"/>
-            </a:solidFill>
-            <a:prstDash val="solid"/>
-            <a:headEnd type="none" w="med" len="med"/>
-            <a:tailEnd type="triangle" w="med" len="med"/>
-          </a:ln>
-        </p:spPr>
-        <p:style>
-          <a:lnRef idx="1">
-            <a:schemeClr val="accent1"/>
-          </a:lnRef>
-          <a:fillRef idx="0">
-            <a:schemeClr val="accent1"/>
-          </a:fillRef>
-          <a:effectRef idx="0">
-            <a:schemeClr val="accent1"/>
-          </a:effectRef>
-          <a:fontRef idx="minor">
-            <a:schemeClr val="tx1"/>
-          </a:fontRef>
-        </p:style>
-      </p:cxnSp>
-      <p:sp>
-        <p:nvSpPr>
-          <p:cNvPr id="169" name="TextBox 168">
-            <a:extLst>
-              <a:ext uri="{FF2B5EF4-FFF2-40B4-BE49-F238E27FC236}">
-                <a16:creationId xmlns:a16="http://schemas.microsoft.com/office/drawing/2014/main" id="{642F4FE5-8487-D3F2-C754-71A7AF2B25A8}"/>
-              </a:ext>
-            </a:extLst>
-          </p:cNvPr>
-          <p:cNvSpPr txBox="1"/>
-          <p:nvPr/>
-        </p:nvSpPr>
-        <p:spPr>
-          <a:xfrm>
-            <a:off x="6792048" y="3118457"/>
-            <a:ext cx="702455" cy="230832"/>
-          </a:xfrm>
-          <a:prstGeom prst="rect">
-            <a:avLst/>
-          </a:prstGeom>
-          <a:noFill/>
-        </p:spPr>
-        <p:txBody>
-          <a:bodyPr wrap="square" rtlCol="0">
-            <a:spAutoFit/>
-          </a:bodyPr>
-          <a:lstStyle/>
-          <a:p>
-            <a:r>
-              <a:rPr lang="en-US" sz="900"/>
-              <a:t>Create</a:t>
-            </a:r>
-            <a:endParaRPr lang="en-KR" sz="900"/>
-          </a:p>
-        </p:txBody>
-      </p:sp>
       <p:sp>
         <p:nvSpPr>
           <p:cNvPr id="2" name="사각형: 둥근 모서리 12">
@@ -48813,6 +48567,25 @@
             <a:r>
               <a:rPr lang="en-US" altLang="ko-KR" sz="900"/>
               <a:t>gateway</a:t>
+            </a:r>
+          </a:p>
+          <a:p>
+            <a:pPr algn="ctr"/>
+            <a:r>
+              <a:rPr lang="en-US" altLang="ko-KR" sz="900"/>
+              <a:t>(</a:t>
+            </a:r>
+            <a:r>
+              <a:rPr lang="ko-KR" altLang="en-US" sz="900" u="sng"/>
+              <a:t>*</a:t>
+            </a:r>
+            <a:r>
+              <a:rPr lang="en-US" altLang="ko-KR" sz="900" u="sng"/>
+              <a:t>.ssup2.com</a:t>
+            </a:r>
+            <a:r>
+              <a:rPr lang="en-US" altLang="ko-KR" sz="900"/>
+              <a:t>)</a:t>
             </a:r>
           </a:p>
           <a:p>
@@ -49266,6 +49039,252 @@
           </a:fontRef>
         </p:style>
       </p:cxnSp>
+      <p:cxnSp>
+        <p:nvCxnSpPr>
+          <p:cNvPr id="13" name="직선 화살표 연결선 96">
+            <a:extLst>
+              <a:ext uri="{FF2B5EF4-FFF2-40B4-BE49-F238E27FC236}">
+                <a16:creationId xmlns:a16="http://schemas.microsoft.com/office/drawing/2014/main" id="{99F504D1-9622-F3A9-B30E-FF02138E4DD8}"/>
+              </a:ext>
+            </a:extLst>
+          </p:cNvPr>
+          <p:cNvCxnSpPr>
+            <a:cxnSpLocks/>
+          </p:cNvCxnSpPr>
+          <p:nvPr/>
+        </p:nvCxnSpPr>
+        <p:spPr>
+          <a:xfrm>
+            <a:off x="6496305" y="3278557"/>
+            <a:ext cx="323569" cy="0"/>
+          </a:xfrm>
+          <a:prstGeom prst="straightConnector1">
+            <a:avLst/>
+          </a:prstGeom>
+          <a:ln w="12700">
+            <a:solidFill>
+              <a:schemeClr val="tx1"/>
+            </a:solidFill>
+            <a:prstDash val="solid"/>
+            <a:headEnd type="none" w="med" len="med"/>
+            <a:tailEnd type="triangle" w="med" len="med"/>
+          </a:ln>
+        </p:spPr>
+        <p:style>
+          <a:lnRef idx="1">
+            <a:schemeClr val="accent1"/>
+          </a:lnRef>
+          <a:fillRef idx="0">
+            <a:schemeClr val="accent1"/>
+          </a:fillRef>
+          <a:effectRef idx="0">
+            <a:schemeClr val="accent1"/>
+          </a:effectRef>
+          <a:fontRef idx="minor">
+            <a:schemeClr val="tx1"/>
+          </a:fontRef>
+        </p:style>
+      </p:cxnSp>
+      <p:sp>
+        <p:nvSpPr>
+          <p:cNvPr id="14" name="TextBox 13">
+            <a:extLst>
+              <a:ext uri="{FF2B5EF4-FFF2-40B4-BE49-F238E27FC236}">
+                <a16:creationId xmlns:a16="http://schemas.microsoft.com/office/drawing/2014/main" id="{A9D4DB68-31FC-D729-75D5-BAEE2FFB4B79}"/>
+              </a:ext>
+            </a:extLst>
+          </p:cNvPr>
+          <p:cNvSpPr txBox="1"/>
+          <p:nvPr/>
+        </p:nvSpPr>
+        <p:spPr>
+          <a:xfrm>
+            <a:off x="6792048" y="3168787"/>
+            <a:ext cx="702455" cy="230832"/>
+          </a:xfrm>
+          <a:prstGeom prst="rect">
+            <a:avLst/>
+          </a:prstGeom>
+          <a:noFill/>
+        </p:spPr>
+        <p:txBody>
+          <a:bodyPr wrap="square" rtlCol="0">
+            <a:spAutoFit/>
+          </a:bodyPr>
+          <a:lstStyle/>
+          <a:p>
+            <a:r>
+              <a:rPr lang="en-US" altLang="ko-KR" sz="900"/>
+              <a:t>Reference</a:t>
+            </a:r>
+            <a:endParaRPr lang="en-KR" sz="900"/>
+          </a:p>
+        </p:txBody>
+      </p:sp>
+      <p:cxnSp>
+        <p:nvCxnSpPr>
+          <p:cNvPr id="18" name="직선 화살표 연결선 96">
+            <a:extLst>
+              <a:ext uri="{FF2B5EF4-FFF2-40B4-BE49-F238E27FC236}">
+                <a16:creationId xmlns:a16="http://schemas.microsoft.com/office/drawing/2014/main" id="{B67A7CB5-4022-4B09-6F88-832793256C66}"/>
+              </a:ext>
+            </a:extLst>
+          </p:cNvPr>
+          <p:cNvCxnSpPr>
+            <a:cxnSpLocks/>
+          </p:cNvCxnSpPr>
+          <p:nvPr/>
+        </p:nvCxnSpPr>
+        <p:spPr>
+          <a:xfrm>
+            <a:off x="6496305" y="3525197"/>
+            <a:ext cx="323569" cy="0"/>
+          </a:xfrm>
+          <a:prstGeom prst="straightConnector1">
+            <a:avLst/>
+          </a:prstGeom>
+          <a:ln w="12700">
+            <a:solidFill>
+              <a:srgbClr val="C00000"/>
+            </a:solidFill>
+            <a:prstDash val="solid"/>
+            <a:headEnd type="none" w="med" len="med"/>
+            <a:tailEnd type="triangle" w="med" len="med"/>
+          </a:ln>
+        </p:spPr>
+        <p:style>
+          <a:lnRef idx="1">
+            <a:schemeClr val="accent1"/>
+          </a:lnRef>
+          <a:fillRef idx="0">
+            <a:schemeClr val="accent1"/>
+          </a:fillRef>
+          <a:effectRef idx="0">
+            <a:schemeClr val="accent1"/>
+          </a:effectRef>
+          <a:fontRef idx="minor">
+            <a:schemeClr val="tx1"/>
+          </a:fontRef>
+        </p:style>
+      </p:cxnSp>
+      <p:sp>
+        <p:nvSpPr>
+          <p:cNvPr id="19" name="TextBox 18">
+            <a:extLst>
+              <a:ext uri="{FF2B5EF4-FFF2-40B4-BE49-F238E27FC236}">
+                <a16:creationId xmlns:a16="http://schemas.microsoft.com/office/drawing/2014/main" id="{69F86657-4BE0-7C9F-ED0B-6E1B2307C64B}"/>
+              </a:ext>
+            </a:extLst>
+          </p:cNvPr>
+          <p:cNvSpPr txBox="1"/>
+          <p:nvPr/>
+        </p:nvSpPr>
+        <p:spPr>
+          <a:xfrm>
+            <a:off x="6792048" y="3415427"/>
+            <a:ext cx="702455" cy="230832"/>
+          </a:xfrm>
+          <a:prstGeom prst="rect">
+            <a:avLst/>
+          </a:prstGeom>
+          <a:noFill/>
+        </p:spPr>
+        <p:txBody>
+          <a:bodyPr wrap="square" rtlCol="0">
+            <a:spAutoFit/>
+          </a:bodyPr>
+          <a:lstStyle/>
+          <a:p>
+            <a:r>
+              <a:rPr lang="en-US" sz="900"/>
+              <a:t>Traffic</a:t>
+            </a:r>
+            <a:endParaRPr lang="en-KR" sz="900"/>
+          </a:p>
+        </p:txBody>
+      </p:sp>
+      <p:cxnSp>
+        <p:nvCxnSpPr>
+          <p:cNvPr id="21" name="직선 화살표 연결선 96">
+            <a:extLst>
+              <a:ext uri="{FF2B5EF4-FFF2-40B4-BE49-F238E27FC236}">
+                <a16:creationId xmlns:a16="http://schemas.microsoft.com/office/drawing/2014/main" id="{DBB2CEDB-FAAB-BA53-0D24-A21B79AF9855}"/>
+              </a:ext>
+            </a:extLst>
+          </p:cNvPr>
+          <p:cNvCxnSpPr>
+            <a:cxnSpLocks/>
+          </p:cNvCxnSpPr>
+          <p:nvPr/>
+        </p:nvCxnSpPr>
+        <p:spPr>
+          <a:xfrm>
+            <a:off x="6496305" y="3773863"/>
+            <a:ext cx="323569" cy="0"/>
+          </a:xfrm>
+          <a:prstGeom prst="straightConnector1">
+            <a:avLst/>
+          </a:prstGeom>
+          <a:ln w="12700">
+            <a:solidFill>
+              <a:schemeClr val="accent3"/>
+            </a:solidFill>
+            <a:prstDash val="solid"/>
+            <a:headEnd type="none" w="med" len="med"/>
+            <a:tailEnd type="triangle" w="med" len="med"/>
+          </a:ln>
+        </p:spPr>
+        <p:style>
+          <a:lnRef idx="1">
+            <a:schemeClr val="accent1"/>
+          </a:lnRef>
+          <a:fillRef idx="0">
+            <a:schemeClr val="accent1"/>
+          </a:fillRef>
+          <a:effectRef idx="0">
+            <a:schemeClr val="accent1"/>
+          </a:effectRef>
+          <a:fontRef idx="minor">
+            <a:schemeClr val="tx1"/>
+          </a:fontRef>
+        </p:style>
+      </p:cxnSp>
+      <p:sp>
+        <p:nvSpPr>
+          <p:cNvPr id="22" name="TextBox 21">
+            <a:extLst>
+              <a:ext uri="{FF2B5EF4-FFF2-40B4-BE49-F238E27FC236}">
+                <a16:creationId xmlns:a16="http://schemas.microsoft.com/office/drawing/2014/main" id="{29DE61BD-DFC6-E238-8A8D-1D1D341E01F5}"/>
+              </a:ext>
+            </a:extLst>
+          </p:cNvPr>
+          <p:cNvSpPr txBox="1"/>
+          <p:nvPr/>
+        </p:nvSpPr>
+        <p:spPr>
+          <a:xfrm>
+            <a:off x="6792048" y="3664093"/>
+            <a:ext cx="702455" cy="230832"/>
+          </a:xfrm>
+          <a:prstGeom prst="rect">
+            <a:avLst/>
+          </a:prstGeom>
+          <a:noFill/>
+        </p:spPr>
+        <p:txBody>
+          <a:bodyPr wrap="square" rtlCol="0">
+            <a:spAutoFit/>
+          </a:bodyPr>
+          <a:lstStyle/>
+          <a:p>
+            <a:r>
+              <a:rPr lang="en-US" sz="900"/>
+              <a:t>Create</a:t>
+            </a:r>
+            <a:endParaRPr lang="en-KR" sz="900"/>
+          </a:p>
+        </p:txBody>
+      </p:sp>
     </p:spTree>
     <p:extLst>
       <p:ext uri="{BB962C8B-B14F-4D97-AF65-F5344CB8AC3E}">
@@ -49872,170 +49891,6 @@
           </a:p>
         </p:txBody>
       </p:sp>
-      <p:cxnSp>
-        <p:nvCxnSpPr>
-          <p:cNvPr id="151" name="직선 화살표 연결선 96">
-            <a:extLst>
-              <a:ext uri="{FF2B5EF4-FFF2-40B4-BE49-F238E27FC236}">
-                <a16:creationId xmlns:a16="http://schemas.microsoft.com/office/drawing/2014/main" id="{98AA2862-545C-3F3E-2058-338C80C38E84}"/>
-              </a:ext>
-            </a:extLst>
-          </p:cNvPr>
-          <p:cNvCxnSpPr>
-            <a:cxnSpLocks/>
-          </p:cNvCxnSpPr>
-          <p:nvPr/>
-        </p:nvCxnSpPr>
-        <p:spPr>
-          <a:xfrm>
-            <a:off x="6496305" y="2732921"/>
-            <a:ext cx="323569" cy="0"/>
-          </a:xfrm>
-          <a:prstGeom prst="straightConnector1">
-            <a:avLst/>
-          </a:prstGeom>
-          <a:ln w="12700">
-            <a:solidFill>
-              <a:schemeClr val="tx1"/>
-            </a:solidFill>
-            <a:prstDash val="solid"/>
-            <a:headEnd type="none" w="med" len="med"/>
-            <a:tailEnd type="triangle" w="med" len="med"/>
-          </a:ln>
-        </p:spPr>
-        <p:style>
-          <a:lnRef idx="1">
-            <a:schemeClr val="accent1"/>
-          </a:lnRef>
-          <a:fillRef idx="0">
-            <a:schemeClr val="accent1"/>
-          </a:fillRef>
-          <a:effectRef idx="0">
-            <a:schemeClr val="accent1"/>
-          </a:effectRef>
-          <a:fontRef idx="minor">
-            <a:schemeClr val="tx1"/>
-          </a:fontRef>
-        </p:style>
-      </p:cxnSp>
-      <p:sp>
-        <p:nvSpPr>
-          <p:cNvPr id="152" name="TextBox 151">
-            <a:extLst>
-              <a:ext uri="{FF2B5EF4-FFF2-40B4-BE49-F238E27FC236}">
-                <a16:creationId xmlns:a16="http://schemas.microsoft.com/office/drawing/2014/main" id="{8B945095-C5C8-68CB-C867-E68041E14FC7}"/>
-              </a:ext>
-            </a:extLst>
-          </p:cNvPr>
-          <p:cNvSpPr txBox="1"/>
-          <p:nvPr/>
-        </p:nvSpPr>
-        <p:spPr>
-          <a:xfrm>
-            <a:off x="6792048" y="2623151"/>
-            <a:ext cx="702455" cy="230832"/>
-          </a:xfrm>
-          <a:prstGeom prst="rect">
-            <a:avLst/>
-          </a:prstGeom>
-          <a:noFill/>
-        </p:spPr>
-        <p:txBody>
-          <a:bodyPr wrap="square" rtlCol="0">
-            <a:spAutoFit/>
-          </a:bodyPr>
-          <a:lstStyle/>
-          <a:p>
-            <a:r>
-              <a:rPr lang="en-US" sz="900"/>
-              <a:t>Reference</a:t>
-            </a:r>
-            <a:endParaRPr lang="en-KR" sz="900"/>
-          </a:p>
-        </p:txBody>
-      </p:sp>
-      <p:cxnSp>
-        <p:nvCxnSpPr>
-          <p:cNvPr id="153" name="직선 화살표 연결선 96">
-            <a:extLst>
-              <a:ext uri="{FF2B5EF4-FFF2-40B4-BE49-F238E27FC236}">
-                <a16:creationId xmlns:a16="http://schemas.microsoft.com/office/drawing/2014/main" id="{F9DA2DCD-670E-7229-20FF-B44E50CC2E39}"/>
-              </a:ext>
-            </a:extLst>
-          </p:cNvPr>
-          <p:cNvCxnSpPr>
-            <a:cxnSpLocks/>
-          </p:cNvCxnSpPr>
-          <p:nvPr/>
-        </p:nvCxnSpPr>
-        <p:spPr>
-          <a:xfrm>
-            <a:off x="6496305" y="2979561"/>
-            <a:ext cx="323569" cy="0"/>
-          </a:xfrm>
-          <a:prstGeom prst="straightConnector1">
-            <a:avLst/>
-          </a:prstGeom>
-          <a:ln w="12700">
-            <a:solidFill>
-              <a:srgbClr val="C00000"/>
-            </a:solidFill>
-            <a:prstDash val="solid"/>
-            <a:headEnd type="none" w="med" len="med"/>
-            <a:tailEnd type="triangle" w="med" len="med"/>
-          </a:ln>
-        </p:spPr>
-        <p:style>
-          <a:lnRef idx="1">
-            <a:schemeClr val="accent1"/>
-          </a:lnRef>
-          <a:fillRef idx="0">
-            <a:schemeClr val="accent1"/>
-          </a:fillRef>
-          <a:effectRef idx="0">
-            <a:schemeClr val="accent1"/>
-          </a:effectRef>
-          <a:fontRef idx="minor">
-            <a:schemeClr val="tx1"/>
-          </a:fontRef>
-        </p:style>
-      </p:cxnSp>
-      <p:sp>
-        <p:nvSpPr>
-          <p:cNvPr id="154" name="TextBox 153">
-            <a:extLst>
-              <a:ext uri="{FF2B5EF4-FFF2-40B4-BE49-F238E27FC236}">
-                <a16:creationId xmlns:a16="http://schemas.microsoft.com/office/drawing/2014/main" id="{203C6C0F-20E4-1BB3-806D-F7218A24174F}"/>
-              </a:ext>
-            </a:extLst>
-          </p:cNvPr>
-          <p:cNvSpPr txBox="1"/>
-          <p:nvPr/>
-        </p:nvSpPr>
-        <p:spPr>
-          <a:xfrm>
-            <a:off x="6792048" y="2869791"/>
-            <a:ext cx="702455" cy="230832"/>
-          </a:xfrm>
-          <a:prstGeom prst="rect">
-            <a:avLst/>
-          </a:prstGeom>
-          <a:noFill/>
-        </p:spPr>
-        <p:txBody>
-          <a:bodyPr wrap="square" rtlCol="0">
-            <a:spAutoFit/>
-          </a:bodyPr>
-          <a:lstStyle/>
-          <a:p>
-            <a:r>
-              <a:rPr lang="en-US" sz="900"/>
-              <a:t>Traffic</a:t>
-            </a:r>
-            <a:endParaRPr lang="en-KR" sz="900"/>
-          </a:p>
-        </p:txBody>
-      </p:sp>
       <p:sp>
         <p:nvSpPr>
           <p:cNvPr id="155" name="사각형: 둥근 모서리 70">
@@ -50472,88 +50327,6 @@
               <a:t>Pod</a:t>
             </a:r>
             <a:endParaRPr lang="ko-KR" altLang="en-US" sz="900" b="1" dirty="0"/>
-          </a:p>
-        </p:txBody>
-      </p:sp>
-      <p:cxnSp>
-        <p:nvCxnSpPr>
-          <p:cNvPr id="168" name="직선 화살표 연결선 96">
-            <a:extLst>
-              <a:ext uri="{FF2B5EF4-FFF2-40B4-BE49-F238E27FC236}">
-                <a16:creationId xmlns:a16="http://schemas.microsoft.com/office/drawing/2014/main" id="{80A63EDA-4EFA-A766-5E1C-0E544F14DB33}"/>
-              </a:ext>
-            </a:extLst>
-          </p:cNvPr>
-          <p:cNvCxnSpPr>
-            <a:cxnSpLocks/>
-          </p:cNvCxnSpPr>
-          <p:nvPr/>
-        </p:nvCxnSpPr>
-        <p:spPr>
-          <a:xfrm>
-            <a:off x="6496305" y="3228227"/>
-            <a:ext cx="323569" cy="0"/>
-          </a:xfrm>
-          <a:prstGeom prst="straightConnector1">
-            <a:avLst/>
-          </a:prstGeom>
-          <a:ln w="12700">
-            <a:solidFill>
-              <a:schemeClr val="accent3"/>
-            </a:solidFill>
-            <a:prstDash val="solid"/>
-            <a:headEnd type="none" w="med" len="med"/>
-            <a:tailEnd type="triangle" w="med" len="med"/>
-          </a:ln>
-        </p:spPr>
-        <p:style>
-          <a:lnRef idx="1">
-            <a:schemeClr val="accent1"/>
-          </a:lnRef>
-          <a:fillRef idx="0">
-            <a:schemeClr val="accent1"/>
-          </a:fillRef>
-          <a:effectRef idx="0">
-            <a:schemeClr val="accent1"/>
-          </a:effectRef>
-          <a:fontRef idx="minor">
-            <a:schemeClr val="tx1"/>
-          </a:fontRef>
-        </p:style>
-      </p:cxnSp>
-      <p:sp>
-        <p:nvSpPr>
-          <p:cNvPr id="169" name="TextBox 168">
-            <a:extLst>
-              <a:ext uri="{FF2B5EF4-FFF2-40B4-BE49-F238E27FC236}">
-                <a16:creationId xmlns:a16="http://schemas.microsoft.com/office/drawing/2014/main" id="{CAFE839C-CDDA-FC96-BE6A-6B918F13E672}"/>
-              </a:ext>
-            </a:extLst>
-          </p:cNvPr>
-          <p:cNvSpPr txBox="1"/>
-          <p:nvPr/>
-        </p:nvSpPr>
-        <p:spPr>
-          <a:xfrm>
-            <a:off x="6792048" y="3118457"/>
-            <a:ext cx="702455" cy="230832"/>
-          </a:xfrm>
-          <a:prstGeom prst="rect">
-            <a:avLst/>
-          </a:prstGeom>
-          <a:noFill/>
-        </p:spPr>
-        <p:txBody>
-          <a:bodyPr wrap="square" rtlCol="0">
-            <a:spAutoFit/>
-          </a:bodyPr>
-          <a:lstStyle/>
-          <a:p>
-            <a:r>
-              <a:rPr lang="en-US" sz="900"/>
-              <a:t>Create</a:t>
-            </a:r>
-            <a:endParaRPr lang="en-KR" sz="900"/>
           </a:p>
         </p:txBody>
       </p:sp>
@@ -50616,6 +50389,26 @@
           <a:p>
             <a:pPr algn="ctr"/>
             <a:r>
+              <a:rPr lang="en-US" altLang="ko-KR" sz="900"/>
+              <a:t>(</a:t>
+            </a:r>
+            <a:r>
+              <a:rPr lang="ko-KR" altLang="en-US" sz="900" u="sng"/>
+              <a:t>*</a:t>
+            </a:r>
+            <a:r>
+              <a:rPr lang="en-US" altLang="ko-KR" sz="900" u="sng"/>
+              <a:t>.ssup2.com</a:t>
+            </a:r>
+            <a:r>
+              <a:rPr lang="en-US" altLang="ko-KR" sz="900"/>
+              <a:t>)</a:t>
+            </a:r>
+            <a:endParaRPr lang="en-US" altLang="ko-KR" sz="900" dirty="0"/>
+          </a:p>
+          <a:p>
+            <a:pPr algn="ctr"/>
+            <a:r>
               <a:rPr lang="en-US" altLang="ko-KR" sz="900" b="1"/>
               <a:t>Gateway</a:t>
             </a:r>
@@ -50767,6 +50560,252 @@
           </a:fontRef>
         </p:style>
       </p:cxnSp>
+      <p:cxnSp>
+        <p:nvCxnSpPr>
+          <p:cNvPr id="9" name="직선 화살표 연결선 96">
+            <a:extLst>
+              <a:ext uri="{FF2B5EF4-FFF2-40B4-BE49-F238E27FC236}">
+                <a16:creationId xmlns:a16="http://schemas.microsoft.com/office/drawing/2014/main" id="{DB649D95-C5B5-B3F0-6B0D-827C05DFDC0F}"/>
+              </a:ext>
+            </a:extLst>
+          </p:cNvPr>
+          <p:cNvCxnSpPr>
+            <a:cxnSpLocks/>
+          </p:cNvCxnSpPr>
+          <p:nvPr/>
+        </p:nvCxnSpPr>
+        <p:spPr>
+          <a:xfrm>
+            <a:off x="6496305" y="3278557"/>
+            <a:ext cx="323569" cy="0"/>
+          </a:xfrm>
+          <a:prstGeom prst="straightConnector1">
+            <a:avLst/>
+          </a:prstGeom>
+          <a:ln w="12700">
+            <a:solidFill>
+              <a:schemeClr val="tx1"/>
+            </a:solidFill>
+            <a:prstDash val="solid"/>
+            <a:headEnd type="none" w="med" len="med"/>
+            <a:tailEnd type="triangle" w="med" len="med"/>
+          </a:ln>
+        </p:spPr>
+        <p:style>
+          <a:lnRef idx="1">
+            <a:schemeClr val="accent1"/>
+          </a:lnRef>
+          <a:fillRef idx="0">
+            <a:schemeClr val="accent1"/>
+          </a:fillRef>
+          <a:effectRef idx="0">
+            <a:schemeClr val="accent1"/>
+          </a:effectRef>
+          <a:fontRef idx="minor">
+            <a:schemeClr val="tx1"/>
+          </a:fontRef>
+        </p:style>
+      </p:cxnSp>
+      <p:sp>
+        <p:nvSpPr>
+          <p:cNvPr id="10" name="TextBox 9">
+            <a:extLst>
+              <a:ext uri="{FF2B5EF4-FFF2-40B4-BE49-F238E27FC236}">
+                <a16:creationId xmlns:a16="http://schemas.microsoft.com/office/drawing/2014/main" id="{6C4FBE47-646A-69B8-3C29-157FD9967BC7}"/>
+              </a:ext>
+            </a:extLst>
+          </p:cNvPr>
+          <p:cNvSpPr txBox="1"/>
+          <p:nvPr/>
+        </p:nvSpPr>
+        <p:spPr>
+          <a:xfrm>
+            <a:off x="6792048" y="3168787"/>
+            <a:ext cx="702455" cy="230832"/>
+          </a:xfrm>
+          <a:prstGeom prst="rect">
+            <a:avLst/>
+          </a:prstGeom>
+          <a:noFill/>
+        </p:spPr>
+        <p:txBody>
+          <a:bodyPr wrap="square" rtlCol="0">
+            <a:spAutoFit/>
+          </a:bodyPr>
+          <a:lstStyle/>
+          <a:p>
+            <a:r>
+              <a:rPr lang="en-US" altLang="ko-KR" sz="900"/>
+              <a:t>Reference</a:t>
+            </a:r>
+            <a:endParaRPr lang="en-KR" sz="900"/>
+          </a:p>
+        </p:txBody>
+      </p:sp>
+      <p:cxnSp>
+        <p:nvCxnSpPr>
+          <p:cNvPr id="12" name="직선 화살표 연결선 96">
+            <a:extLst>
+              <a:ext uri="{FF2B5EF4-FFF2-40B4-BE49-F238E27FC236}">
+                <a16:creationId xmlns:a16="http://schemas.microsoft.com/office/drawing/2014/main" id="{AF06EE9B-C4B1-08F1-AE6D-AF8F2588572D}"/>
+              </a:ext>
+            </a:extLst>
+          </p:cNvPr>
+          <p:cNvCxnSpPr>
+            <a:cxnSpLocks/>
+          </p:cNvCxnSpPr>
+          <p:nvPr/>
+        </p:nvCxnSpPr>
+        <p:spPr>
+          <a:xfrm>
+            <a:off x="6496305" y="3525197"/>
+            <a:ext cx="323569" cy="0"/>
+          </a:xfrm>
+          <a:prstGeom prst="straightConnector1">
+            <a:avLst/>
+          </a:prstGeom>
+          <a:ln w="12700">
+            <a:solidFill>
+              <a:srgbClr val="C00000"/>
+            </a:solidFill>
+            <a:prstDash val="solid"/>
+            <a:headEnd type="none" w="med" len="med"/>
+            <a:tailEnd type="triangle" w="med" len="med"/>
+          </a:ln>
+        </p:spPr>
+        <p:style>
+          <a:lnRef idx="1">
+            <a:schemeClr val="accent1"/>
+          </a:lnRef>
+          <a:fillRef idx="0">
+            <a:schemeClr val="accent1"/>
+          </a:fillRef>
+          <a:effectRef idx="0">
+            <a:schemeClr val="accent1"/>
+          </a:effectRef>
+          <a:fontRef idx="minor">
+            <a:schemeClr val="tx1"/>
+          </a:fontRef>
+        </p:style>
+      </p:cxnSp>
+      <p:sp>
+        <p:nvSpPr>
+          <p:cNvPr id="13" name="TextBox 12">
+            <a:extLst>
+              <a:ext uri="{FF2B5EF4-FFF2-40B4-BE49-F238E27FC236}">
+                <a16:creationId xmlns:a16="http://schemas.microsoft.com/office/drawing/2014/main" id="{B1686642-9811-D02B-C45A-932315166D8D}"/>
+              </a:ext>
+            </a:extLst>
+          </p:cNvPr>
+          <p:cNvSpPr txBox="1"/>
+          <p:nvPr/>
+        </p:nvSpPr>
+        <p:spPr>
+          <a:xfrm>
+            <a:off x="6792048" y="3415427"/>
+            <a:ext cx="702455" cy="230832"/>
+          </a:xfrm>
+          <a:prstGeom prst="rect">
+            <a:avLst/>
+          </a:prstGeom>
+          <a:noFill/>
+        </p:spPr>
+        <p:txBody>
+          <a:bodyPr wrap="square" rtlCol="0">
+            <a:spAutoFit/>
+          </a:bodyPr>
+          <a:lstStyle/>
+          <a:p>
+            <a:r>
+              <a:rPr lang="en-US" sz="900"/>
+              <a:t>Traffic</a:t>
+            </a:r>
+            <a:endParaRPr lang="en-KR" sz="900"/>
+          </a:p>
+        </p:txBody>
+      </p:sp>
+      <p:cxnSp>
+        <p:nvCxnSpPr>
+          <p:cNvPr id="14" name="직선 화살표 연결선 96">
+            <a:extLst>
+              <a:ext uri="{FF2B5EF4-FFF2-40B4-BE49-F238E27FC236}">
+                <a16:creationId xmlns:a16="http://schemas.microsoft.com/office/drawing/2014/main" id="{2E5BF519-86ED-685B-8181-F5397E116EC4}"/>
+              </a:ext>
+            </a:extLst>
+          </p:cNvPr>
+          <p:cNvCxnSpPr>
+            <a:cxnSpLocks/>
+          </p:cNvCxnSpPr>
+          <p:nvPr/>
+        </p:nvCxnSpPr>
+        <p:spPr>
+          <a:xfrm>
+            <a:off x="6496305" y="3773863"/>
+            <a:ext cx="323569" cy="0"/>
+          </a:xfrm>
+          <a:prstGeom prst="straightConnector1">
+            <a:avLst/>
+          </a:prstGeom>
+          <a:ln w="12700">
+            <a:solidFill>
+              <a:schemeClr val="accent3"/>
+            </a:solidFill>
+            <a:prstDash val="solid"/>
+            <a:headEnd type="none" w="med" len="med"/>
+            <a:tailEnd type="triangle" w="med" len="med"/>
+          </a:ln>
+        </p:spPr>
+        <p:style>
+          <a:lnRef idx="1">
+            <a:schemeClr val="accent1"/>
+          </a:lnRef>
+          <a:fillRef idx="0">
+            <a:schemeClr val="accent1"/>
+          </a:fillRef>
+          <a:effectRef idx="0">
+            <a:schemeClr val="accent1"/>
+          </a:effectRef>
+          <a:fontRef idx="minor">
+            <a:schemeClr val="tx1"/>
+          </a:fontRef>
+        </p:style>
+      </p:cxnSp>
+      <p:sp>
+        <p:nvSpPr>
+          <p:cNvPr id="17" name="TextBox 16">
+            <a:extLst>
+              <a:ext uri="{FF2B5EF4-FFF2-40B4-BE49-F238E27FC236}">
+                <a16:creationId xmlns:a16="http://schemas.microsoft.com/office/drawing/2014/main" id="{D30E3F1F-DA54-4518-BF4A-17D00DB579C7}"/>
+              </a:ext>
+            </a:extLst>
+          </p:cNvPr>
+          <p:cNvSpPr txBox="1"/>
+          <p:nvPr/>
+        </p:nvSpPr>
+        <p:spPr>
+          <a:xfrm>
+            <a:off x="6792048" y="3664093"/>
+            <a:ext cx="702455" cy="230832"/>
+          </a:xfrm>
+          <a:prstGeom prst="rect">
+            <a:avLst/>
+          </a:prstGeom>
+          <a:noFill/>
+        </p:spPr>
+        <p:txBody>
+          <a:bodyPr wrap="square" rtlCol="0">
+            <a:spAutoFit/>
+          </a:bodyPr>
+          <a:lstStyle/>
+          <a:p>
+            <a:r>
+              <a:rPr lang="en-US" sz="900"/>
+              <a:t>Create</a:t>
+            </a:r>
+            <a:endParaRPr lang="en-KR" sz="900"/>
+          </a:p>
+        </p:txBody>
+      </p:sp>
     </p:spTree>
     <p:extLst>
       <p:ext uri="{BB962C8B-B14F-4D97-AF65-F5344CB8AC3E}">
@@ -52296,6 +52335,25 @@
           <a:p>
             <a:pPr algn="ctr"/>
             <a:r>
+              <a:rPr lang="en-US" altLang="ko-KR" sz="900"/>
+              <a:t>(</a:t>
+            </a:r>
+            <a:r>
+              <a:rPr lang="ko-KR" altLang="en-US" sz="900" u="sng"/>
+              <a:t>*</a:t>
+            </a:r>
+            <a:r>
+              <a:rPr lang="en-US" altLang="ko-KR" sz="900" u="sng"/>
+              <a:t>.ssup2.com</a:t>
+            </a:r>
+            <a:r>
+              <a:rPr lang="en-US" altLang="ko-KR" sz="900"/>
+              <a:t>)</a:t>
+            </a:r>
+          </a:p>
+          <a:p>
+            <a:pPr algn="ctr"/>
+            <a:r>
               <a:rPr lang="en-US" altLang="ko-KR" sz="900" b="1"/>
               <a:t>Gateway</a:t>
             </a:r>
@@ -52606,6 +52664,21 @@
             <a:r>
               <a:rPr lang="en-US" altLang="ko-KR" sz="900" dirty="0" err="1"/>
               <a:t>server</a:t>
+            </a:r>
+          </a:p>
+          <a:p>
+            <a:pPr algn="ctr"/>
+            <a:r>
+              <a:rPr lang="en-US" altLang="ko-KR" sz="900"/>
+              <a:t>(</a:t>
+            </a:r>
+            <a:r>
+              <a:rPr lang="en-US" altLang="ko-KR" sz="900" u="sng"/>
+              <a:t>server.ssup2.com</a:t>
+            </a:r>
+            <a:r>
+              <a:rPr lang="en-US" altLang="ko-KR" sz="900"/>
+              <a:t>)</a:t>
             </a:r>
             <a:endParaRPr lang="en-US" altLang="ko-KR" sz="900" dirty="0"/>
           </a:p>
@@ -53744,170 +53817,6 @@
           </a:p>
         </p:txBody>
       </p:sp>
-      <p:cxnSp>
-        <p:nvCxnSpPr>
-          <p:cNvPr id="151" name="직선 화살표 연결선 96">
-            <a:extLst>
-              <a:ext uri="{FF2B5EF4-FFF2-40B4-BE49-F238E27FC236}">
-                <a16:creationId xmlns:a16="http://schemas.microsoft.com/office/drawing/2014/main" id="{0BA641E3-9AEF-70CA-FB00-FEFFDF33112C}"/>
-              </a:ext>
-            </a:extLst>
-          </p:cNvPr>
-          <p:cNvCxnSpPr>
-            <a:cxnSpLocks/>
-          </p:cNvCxnSpPr>
-          <p:nvPr/>
-        </p:nvCxnSpPr>
-        <p:spPr>
-          <a:xfrm>
-            <a:off x="6496305" y="2732921"/>
-            <a:ext cx="323569" cy="0"/>
-          </a:xfrm>
-          <a:prstGeom prst="straightConnector1">
-            <a:avLst/>
-          </a:prstGeom>
-          <a:ln w="12700">
-            <a:solidFill>
-              <a:schemeClr val="tx1"/>
-            </a:solidFill>
-            <a:prstDash val="solid"/>
-            <a:headEnd type="none" w="med" len="med"/>
-            <a:tailEnd type="triangle" w="med" len="med"/>
-          </a:ln>
-        </p:spPr>
-        <p:style>
-          <a:lnRef idx="1">
-            <a:schemeClr val="accent1"/>
-          </a:lnRef>
-          <a:fillRef idx="0">
-            <a:schemeClr val="accent1"/>
-          </a:fillRef>
-          <a:effectRef idx="0">
-            <a:schemeClr val="accent1"/>
-          </a:effectRef>
-          <a:fontRef idx="minor">
-            <a:schemeClr val="tx1"/>
-          </a:fontRef>
-        </p:style>
-      </p:cxnSp>
-      <p:sp>
-        <p:nvSpPr>
-          <p:cNvPr id="152" name="TextBox 151">
-            <a:extLst>
-              <a:ext uri="{FF2B5EF4-FFF2-40B4-BE49-F238E27FC236}">
-                <a16:creationId xmlns:a16="http://schemas.microsoft.com/office/drawing/2014/main" id="{41847B9E-CC20-EC35-5DEC-1ABAB5E94F42}"/>
-              </a:ext>
-            </a:extLst>
-          </p:cNvPr>
-          <p:cNvSpPr txBox="1"/>
-          <p:nvPr/>
-        </p:nvSpPr>
-        <p:spPr>
-          <a:xfrm>
-            <a:off x="6792048" y="2623151"/>
-            <a:ext cx="702455" cy="230832"/>
-          </a:xfrm>
-          <a:prstGeom prst="rect">
-            <a:avLst/>
-          </a:prstGeom>
-          <a:noFill/>
-        </p:spPr>
-        <p:txBody>
-          <a:bodyPr wrap="square" rtlCol="0">
-            <a:spAutoFit/>
-          </a:bodyPr>
-          <a:lstStyle/>
-          <a:p>
-            <a:r>
-              <a:rPr lang="en-US" sz="900"/>
-              <a:t>Reference</a:t>
-            </a:r>
-            <a:endParaRPr lang="en-KR" sz="900"/>
-          </a:p>
-        </p:txBody>
-      </p:sp>
-      <p:cxnSp>
-        <p:nvCxnSpPr>
-          <p:cNvPr id="153" name="직선 화살표 연결선 96">
-            <a:extLst>
-              <a:ext uri="{FF2B5EF4-FFF2-40B4-BE49-F238E27FC236}">
-                <a16:creationId xmlns:a16="http://schemas.microsoft.com/office/drawing/2014/main" id="{619752D0-E1C0-587B-5F61-E89E783F6988}"/>
-              </a:ext>
-            </a:extLst>
-          </p:cNvPr>
-          <p:cNvCxnSpPr>
-            <a:cxnSpLocks/>
-          </p:cNvCxnSpPr>
-          <p:nvPr/>
-        </p:nvCxnSpPr>
-        <p:spPr>
-          <a:xfrm>
-            <a:off x="6496305" y="2979561"/>
-            <a:ext cx="323569" cy="0"/>
-          </a:xfrm>
-          <a:prstGeom prst="straightConnector1">
-            <a:avLst/>
-          </a:prstGeom>
-          <a:ln w="12700">
-            <a:solidFill>
-              <a:srgbClr val="C00000"/>
-            </a:solidFill>
-            <a:prstDash val="solid"/>
-            <a:headEnd type="none" w="med" len="med"/>
-            <a:tailEnd type="triangle" w="med" len="med"/>
-          </a:ln>
-        </p:spPr>
-        <p:style>
-          <a:lnRef idx="1">
-            <a:schemeClr val="accent1"/>
-          </a:lnRef>
-          <a:fillRef idx="0">
-            <a:schemeClr val="accent1"/>
-          </a:fillRef>
-          <a:effectRef idx="0">
-            <a:schemeClr val="accent1"/>
-          </a:effectRef>
-          <a:fontRef idx="minor">
-            <a:schemeClr val="tx1"/>
-          </a:fontRef>
-        </p:style>
-      </p:cxnSp>
-      <p:sp>
-        <p:nvSpPr>
-          <p:cNvPr id="154" name="TextBox 153">
-            <a:extLst>
-              <a:ext uri="{FF2B5EF4-FFF2-40B4-BE49-F238E27FC236}">
-                <a16:creationId xmlns:a16="http://schemas.microsoft.com/office/drawing/2014/main" id="{D607C0CE-F6D2-F4AE-7338-E4375DD82CE2}"/>
-              </a:ext>
-            </a:extLst>
-          </p:cNvPr>
-          <p:cNvSpPr txBox="1"/>
-          <p:nvPr/>
-        </p:nvSpPr>
-        <p:spPr>
-          <a:xfrm>
-            <a:off x="6792048" y="2869791"/>
-            <a:ext cx="702455" cy="230832"/>
-          </a:xfrm>
-          <a:prstGeom prst="rect">
-            <a:avLst/>
-          </a:prstGeom>
-          <a:noFill/>
-        </p:spPr>
-        <p:txBody>
-          <a:bodyPr wrap="square" rtlCol="0">
-            <a:spAutoFit/>
-          </a:bodyPr>
-          <a:lstStyle/>
-          <a:p>
-            <a:r>
-              <a:rPr lang="en-US" sz="900"/>
-              <a:t>Traffic</a:t>
-            </a:r>
-            <a:endParaRPr lang="en-KR" sz="900"/>
-          </a:p>
-        </p:txBody>
-      </p:sp>
       <p:sp>
         <p:nvSpPr>
           <p:cNvPr id="155" name="사각형: 둥근 모서리 70">
@@ -54344,88 +54253,6 @@
               <a:t>Pod</a:t>
             </a:r>
             <a:endParaRPr lang="ko-KR" altLang="en-US" sz="900" b="1" dirty="0"/>
-          </a:p>
-        </p:txBody>
-      </p:sp>
-      <p:cxnSp>
-        <p:nvCxnSpPr>
-          <p:cNvPr id="168" name="직선 화살표 연결선 96">
-            <a:extLst>
-              <a:ext uri="{FF2B5EF4-FFF2-40B4-BE49-F238E27FC236}">
-                <a16:creationId xmlns:a16="http://schemas.microsoft.com/office/drawing/2014/main" id="{54719A66-ABC6-8D77-B055-F0C15C959D6B}"/>
-              </a:ext>
-            </a:extLst>
-          </p:cNvPr>
-          <p:cNvCxnSpPr>
-            <a:cxnSpLocks/>
-          </p:cNvCxnSpPr>
-          <p:nvPr/>
-        </p:nvCxnSpPr>
-        <p:spPr>
-          <a:xfrm>
-            <a:off x="6496305" y="3228227"/>
-            <a:ext cx="323569" cy="0"/>
-          </a:xfrm>
-          <a:prstGeom prst="straightConnector1">
-            <a:avLst/>
-          </a:prstGeom>
-          <a:ln w="12700">
-            <a:solidFill>
-              <a:schemeClr val="accent3"/>
-            </a:solidFill>
-            <a:prstDash val="solid"/>
-            <a:headEnd type="none" w="med" len="med"/>
-            <a:tailEnd type="triangle" w="med" len="med"/>
-          </a:ln>
-        </p:spPr>
-        <p:style>
-          <a:lnRef idx="1">
-            <a:schemeClr val="accent1"/>
-          </a:lnRef>
-          <a:fillRef idx="0">
-            <a:schemeClr val="accent1"/>
-          </a:fillRef>
-          <a:effectRef idx="0">
-            <a:schemeClr val="accent1"/>
-          </a:effectRef>
-          <a:fontRef idx="minor">
-            <a:schemeClr val="tx1"/>
-          </a:fontRef>
-        </p:style>
-      </p:cxnSp>
-      <p:sp>
-        <p:nvSpPr>
-          <p:cNvPr id="169" name="TextBox 168">
-            <a:extLst>
-              <a:ext uri="{FF2B5EF4-FFF2-40B4-BE49-F238E27FC236}">
-                <a16:creationId xmlns:a16="http://schemas.microsoft.com/office/drawing/2014/main" id="{D0ACA350-26BB-4DE7-9468-F70404D91354}"/>
-              </a:ext>
-            </a:extLst>
-          </p:cNvPr>
-          <p:cNvSpPr txBox="1"/>
-          <p:nvPr/>
-        </p:nvSpPr>
-        <p:spPr>
-          <a:xfrm>
-            <a:off x="6792048" y="3118457"/>
-            <a:ext cx="702455" cy="230832"/>
-          </a:xfrm>
-          <a:prstGeom prst="rect">
-            <a:avLst/>
-          </a:prstGeom>
-          <a:noFill/>
-        </p:spPr>
-        <p:txBody>
-          <a:bodyPr wrap="square" rtlCol="0">
-            <a:spAutoFit/>
-          </a:bodyPr>
-          <a:lstStyle/>
-          <a:p>
-            <a:r>
-              <a:rPr lang="en-US" sz="900"/>
-              <a:t>Create</a:t>
-            </a:r>
-            <a:endParaRPr lang="en-KR" sz="900"/>
           </a:p>
         </p:txBody>
       </p:sp>
@@ -54488,6 +54315,26 @@
           <a:p>
             <a:pPr algn="ctr"/>
             <a:r>
+              <a:rPr lang="en-US" altLang="ko-KR" sz="900"/>
+              <a:t>(</a:t>
+            </a:r>
+            <a:r>
+              <a:rPr lang="ko-KR" altLang="en-US" sz="900" u="sng"/>
+              <a:t>*</a:t>
+            </a:r>
+            <a:r>
+              <a:rPr lang="en-US" altLang="ko-KR" sz="900" u="sng"/>
+              <a:t>.ssup2.com</a:t>
+            </a:r>
+            <a:r>
+              <a:rPr lang="en-US" altLang="ko-KR" sz="900"/>
+              <a:t>)</a:t>
+            </a:r>
+            <a:endParaRPr lang="en-US" altLang="ko-KR" sz="900" dirty="0"/>
+          </a:p>
+          <a:p>
+            <a:pPr algn="ctr"/>
+            <a:r>
               <a:rPr lang="en-US" altLang="ko-KR" sz="900" b="1"/>
               <a:t>Gateway</a:t>
             </a:r>
@@ -54550,6 +54397,21 @@
               <a:rPr lang="en-US" altLang="ko-KR" sz="900" dirty="0" err="1"/>
               <a:t>server-ingress</a:t>
             </a:r>
+          </a:p>
+          <a:p>
+            <a:pPr algn="ctr"/>
+            <a:r>
+              <a:rPr lang="en-US" altLang="ko-KR" sz="900"/>
+              <a:t>(</a:t>
+            </a:r>
+            <a:r>
+              <a:rPr lang="en-US" altLang="ko-KR" sz="900" u="sng"/>
+              <a:t>server.ssup2.com</a:t>
+            </a:r>
+            <a:r>
+              <a:rPr lang="en-US" altLang="ko-KR" sz="900"/>
+              <a:t>)</a:t>
+            </a:r>
             <a:endParaRPr lang="en-US" altLang="ko-KR" sz="900" dirty="0"/>
           </a:p>
           <a:p>
@@ -55038,6 +54900,252 @@
           </a:fontRef>
         </p:style>
       </p:cxnSp>
+      <p:cxnSp>
+        <p:nvCxnSpPr>
+          <p:cNvPr id="10" name="직선 화살표 연결선 96">
+            <a:extLst>
+              <a:ext uri="{FF2B5EF4-FFF2-40B4-BE49-F238E27FC236}">
+                <a16:creationId xmlns:a16="http://schemas.microsoft.com/office/drawing/2014/main" id="{B5E5E367-7BF3-AC41-B02B-4B50B21952E4}"/>
+              </a:ext>
+            </a:extLst>
+          </p:cNvPr>
+          <p:cNvCxnSpPr>
+            <a:cxnSpLocks/>
+          </p:cNvCxnSpPr>
+          <p:nvPr/>
+        </p:nvCxnSpPr>
+        <p:spPr>
+          <a:xfrm>
+            <a:off x="6496305" y="3278557"/>
+            <a:ext cx="323569" cy="0"/>
+          </a:xfrm>
+          <a:prstGeom prst="straightConnector1">
+            <a:avLst/>
+          </a:prstGeom>
+          <a:ln w="12700">
+            <a:solidFill>
+              <a:schemeClr val="tx1"/>
+            </a:solidFill>
+            <a:prstDash val="solid"/>
+            <a:headEnd type="none" w="med" len="med"/>
+            <a:tailEnd type="triangle" w="med" len="med"/>
+          </a:ln>
+        </p:spPr>
+        <p:style>
+          <a:lnRef idx="1">
+            <a:schemeClr val="accent1"/>
+          </a:lnRef>
+          <a:fillRef idx="0">
+            <a:schemeClr val="accent1"/>
+          </a:fillRef>
+          <a:effectRef idx="0">
+            <a:schemeClr val="accent1"/>
+          </a:effectRef>
+          <a:fontRef idx="minor">
+            <a:schemeClr val="tx1"/>
+          </a:fontRef>
+        </p:style>
+      </p:cxnSp>
+      <p:sp>
+        <p:nvSpPr>
+          <p:cNvPr id="11" name="TextBox 10">
+            <a:extLst>
+              <a:ext uri="{FF2B5EF4-FFF2-40B4-BE49-F238E27FC236}">
+                <a16:creationId xmlns:a16="http://schemas.microsoft.com/office/drawing/2014/main" id="{29425E12-75F3-801F-A33B-48767FC4364F}"/>
+              </a:ext>
+            </a:extLst>
+          </p:cNvPr>
+          <p:cNvSpPr txBox="1"/>
+          <p:nvPr/>
+        </p:nvSpPr>
+        <p:spPr>
+          <a:xfrm>
+            <a:off x="6792048" y="3168787"/>
+            <a:ext cx="702455" cy="230832"/>
+          </a:xfrm>
+          <a:prstGeom prst="rect">
+            <a:avLst/>
+          </a:prstGeom>
+          <a:noFill/>
+        </p:spPr>
+        <p:txBody>
+          <a:bodyPr wrap="square" rtlCol="0">
+            <a:spAutoFit/>
+          </a:bodyPr>
+          <a:lstStyle/>
+          <a:p>
+            <a:r>
+              <a:rPr lang="en-US" altLang="ko-KR" sz="900"/>
+              <a:t>Reference</a:t>
+            </a:r>
+            <a:endParaRPr lang="en-KR" sz="900"/>
+          </a:p>
+        </p:txBody>
+      </p:sp>
+      <p:cxnSp>
+        <p:nvCxnSpPr>
+          <p:cNvPr id="12" name="직선 화살표 연결선 96">
+            <a:extLst>
+              <a:ext uri="{FF2B5EF4-FFF2-40B4-BE49-F238E27FC236}">
+                <a16:creationId xmlns:a16="http://schemas.microsoft.com/office/drawing/2014/main" id="{07475E9B-00AF-39A5-8697-3698705A61EC}"/>
+              </a:ext>
+            </a:extLst>
+          </p:cNvPr>
+          <p:cNvCxnSpPr>
+            <a:cxnSpLocks/>
+          </p:cNvCxnSpPr>
+          <p:nvPr/>
+        </p:nvCxnSpPr>
+        <p:spPr>
+          <a:xfrm>
+            <a:off x="6496305" y="3525197"/>
+            <a:ext cx="323569" cy="0"/>
+          </a:xfrm>
+          <a:prstGeom prst="straightConnector1">
+            <a:avLst/>
+          </a:prstGeom>
+          <a:ln w="12700">
+            <a:solidFill>
+              <a:srgbClr val="C00000"/>
+            </a:solidFill>
+            <a:prstDash val="solid"/>
+            <a:headEnd type="none" w="med" len="med"/>
+            <a:tailEnd type="triangle" w="med" len="med"/>
+          </a:ln>
+        </p:spPr>
+        <p:style>
+          <a:lnRef idx="1">
+            <a:schemeClr val="accent1"/>
+          </a:lnRef>
+          <a:fillRef idx="0">
+            <a:schemeClr val="accent1"/>
+          </a:fillRef>
+          <a:effectRef idx="0">
+            <a:schemeClr val="accent1"/>
+          </a:effectRef>
+          <a:fontRef idx="minor">
+            <a:schemeClr val="tx1"/>
+          </a:fontRef>
+        </p:style>
+      </p:cxnSp>
+      <p:sp>
+        <p:nvSpPr>
+          <p:cNvPr id="14" name="TextBox 13">
+            <a:extLst>
+              <a:ext uri="{FF2B5EF4-FFF2-40B4-BE49-F238E27FC236}">
+                <a16:creationId xmlns:a16="http://schemas.microsoft.com/office/drawing/2014/main" id="{D7DA2CB8-53CD-AF21-89C9-7EE39C2ECF51}"/>
+              </a:ext>
+            </a:extLst>
+          </p:cNvPr>
+          <p:cNvSpPr txBox="1"/>
+          <p:nvPr/>
+        </p:nvSpPr>
+        <p:spPr>
+          <a:xfrm>
+            <a:off x="6792048" y="3415427"/>
+            <a:ext cx="702455" cy="230832"/>
+          </a:xfrm>
+          <a:prstGeom prst="rect">
+            <a:avLst/>
+          </a:prstGeom>
+          <a:noFill/>
+        </p:spPr>
+        <p:txBody>
+          <a:bodyPr wrap="square" rtlCol="0">
+            <a:spAutoFit/>
+          </a:bodyPr>
+          <a:lstStyle/>
+          <a:p>
+            <a:r>
+              <a:rPr lang="en-US" sz="900"/>
+              <a:t>Traffic</a:t>
+            </a:r>
+            <a:endParaRPr lang="en-KR" sz="900"/>
+          </a:p>
+        </p:txBody>
+      </p:sp>
+      <p:cxnSp>
+        <p:nvCxnSpPr>
+          <p:cNvPr id="17" name="직선 화살표 연결선 96">
+            <a:extLst>
+              <a:ext uri="{FF2B5EF4-FFF2-40B4-BE49-F238E27FC236}">
+                <a16:creationId xmlns:a16="http://schemas.microsoft.com/office/drawing/2014/main" id="{19AE6972-7BBF-394C-0BBB-4399482C1644}"/>
+              </a:ext>
+            </a:extLst>
+          </p:cNvPr>
+          <p:cNvCxnSpPr>
+            <a:cxnSpLocks/>
+          </p:cNvCxnSpPr>
+          <p:nvPr/>
+        </p:nvCxnSpPr>
+        <p:spPr>
+          <a:xfrm>
+            <a:off x="6496305" y="3773863"/>
+            <a:ext cx="323569" cy="0"/>
+          </a:xfrm>
+          <a:prstGeom prst="straightConnector1">
+            <a:avLst/>
+          </a:prstGeom>
+          <a:ln w="12700">
+            <a:solidFill>
+              <a:schemeClr val="accent3"/>
+            </a:solidFill>
+            <a:prstDash val="solid"/>
+            <a:headEnd type="none" w="med" len="med"/>
+            <a:tailEnd type="triangle" w="med" len="med"/>
+          </a:ln>
+        </p:spPr>
+        <p:style>
+          <a:lnRef idx="1">
+            <a:schemeClr val="accent1"/>
+          </a:lnRef>
+          <a:fillRef idx="0">
+            <a:schemeClr val="accent1"/>
+          </a:fillRef>
+          <a:effectRef idx="0">
+            <a:schemeClr val="accent1"/>
+          </a:effectRef>
+          <a:fontRef idx="minor">
+            <a:schemeClr val="tx1"/>
+          </a:fontRef>
+        </p:style>
+      </p:cxnSp>
+      <p:sp>
+        <p:nvSpPr>
+          <p:cNvPr id="18" name="TextBox 17">
+            <a:extLst>
+              <a:ext uri="{FF2B5EF4-FFF2-40B4-BE49-F238E27FC236}">
+                <a16:creationId xmlns:a16="http://schemas.microsoft.com/office/drawing/2014/main" id="{41AAE3FA-988E-CE7C-032A-D1FC178345E2}"/>
+              </a:ext>
+            </a:extLst>
+          </p:cNvPr>
+          <p:cNvSpPr txBox="1"/>
+          <p:nvPr/>
+        </p:nvSpPr>
+        <p:spPr>
+          <a:xfrm>
+            <a:off x="6792048" y="3664093"/>
+            <a:ext cx="702455" cy="230832"/>
+          </a:xfrm>
+          <a:prstGeom prst="rect">
+            <a:avLst/>
+          </a:prstGeom>
+          <a:noFill/>
+        </p:spPr>
+        <p:txBody>
+          <a:bodyPr wrap="square" rtlCol="0">
+            <a:spAutoFit/>
+          </a:bodyPr>
+          <a:lstStyle/>
+          <a:p>
+            <a:r>
+              <a:rPr lang="en-US" sz="900"/>
+              <a:t>Create</a:t>
+            </a:r>
+            <a:endParaRPr lang="en-KR" sz="900"/>
+          </a:p>
+        </p:txBody>
+      </p:sp>
     </p:spTree>
     <p:extLst>
       <p:ext uri="{BB962C8B-B14F-4D97-AF65-F5344CB8AC3E}">
@@ -55644,170 +55752,6 @@
           </a:p>
         </p:txBody>
       </p:sp>
-      <p:cxnSp>
-        <p:nvCxnSpPr>
-          <p:cNvPr id="151" name="직선 화살표 연결선 96">
-            <a:extLst>
-              <a:ext uri="{FF2B5EF4-FFF2-40B4-BE49-F238E27FC236}">
-                <a16:creationId xmlns:a16="http://schemas.microsoft.com/office/drawing/2014/main" id="{A250C9AB-FDC3-109D-929C-6C1A9285F23F}"/>
-              </a:ext>
-            </a:extLst>
-          </p:cNvPr>
-          <p:cNvCxnSpPr>
-            <a:cxnSpLocks/>
-          </p:cNvCxnSpPr>
-          <p:nvPr/>
-        </p:nvCxnSpPr>
-        <p:spPr>
-          <a:xfrm>
-            <a:off x="6496305" y="2732921"/>
-            <a:ext cx="323569" cy="0"/>
-          </a:xfrm>
-          <a:prstGeom prst="straightConnector1">
-            <a:avLst/>
-          </a:prstGeom>
-          <a:ln w="12700">
-            <a:solidFill>
-              <a:schemeClr val="tx1"/>
-            </a:solidFill>
-            <a:prstDash val="solid"/>
-            <a:headEnd type="none" w="med" len="med"/>
-            <a:tailEnd type="triangle" w="med" len="med"/>
-          </a:ln>
-        </p:spPr>
-        <p:style>
-          <a:lnRef idx="1">
-            <a:schemeClr val="accent1"/>
-          </a:lnRef>
-          <a:fillRef idx="0">
-            <a:schemeClr val="accent1"/>
-          </a:fillRef>
-          <a:effectRef idx="0">
-            <a:schemeClr val="accent1"/>
-          </a:effectRef>
-          <a:fontRef idx="minor">
-            <a:schemeClr val="tx1"/>
-          </a:fontRef>
-        </p:style>
-      </p:cxnSp>
-      <p:sp>
-        <p:nvSpPr>
-          <p:cNvPr id="152" name="TextBox 151">
-            <a:extLst>
-              <a:ext uri="{FF2B5EF4-FFF2-40B4-BE49-F238E27FC236}">
-                <a16:creationId xmlns:a16="http://schemas.microsoft.com/office/drawing/2014/main" id="{44B73C05-120D-A8E3-F20B-47FD6086C0D4}"/>
-              </a:ext>
-            </a:extLst>
-          </p:cNvPr>
-          <p:cNvSpPr txBox="1"/>
-          <p:nvPr/>
-        </p:nvSpPr>
-        <p:spPr>
-          <a:xfrm>
-            <a:off x="6792048" y="2623151"/>
-            <a:ext cx="702455" cy="230832"/>
-          </a:xfrm>
-          <a:prstGeom prst="rect">
-            <a:avLst/>
-          </a:prstGeom>
-          <a:noFill/>
-        </p:spPr>
-        <p:txBody>
-          <a:bodyPr wrap="square" rtlCol="0">
-            <a:spAutoFit/>
-          </a:bodyPr>
-          <a:lstStyle/>
-          <a:p>
-            <a:r>
-              <a:rPr lang="en-US" sz="900"/>
-              <a:t>Reference</a:t>
-            </a:r>
-            <a:endParaRPr lang="en-KR" sz="900"/>
-          </a:p>
-        </p:txBody>
-      </p:sp>
-      <p:cxnSp>
-        <p:nvCxnSpPr>
-          <p:cNvPr id="153" name="직선 화살표 연결선 96">
-            <a:extLst>
-              <a:ext uri="{FF2B5EF4-FFF2-40B4-BE49-F238E27FC236}">
-                <a16:creationId xmlns:a16="http://schemas.microsoft.com/office/drawing/2014/main" id="{8FA6976C-1E6E-EF86-8862-1FFB1456081F}"/>
-              </a:ext>
-            </a:extLst>
-          </p:cNvPr>
-          <p:cNvCxnSpPr>
-            <a:cxnSpLocks/>
-          </p:cNvCxnSpPr>
-          <p:nvPr/>
-        </p:nvCxnSpPr>
-        <p:spPr>
-          <a:xfrm>
-            <a:off x="6496305" y="2979561"/>
-            <a:ext cx="323569" cy="0"/>
-          </a:xfrm>
-          <a:prstGeom prst="straightConnector1">
-            <a:avLst/>
-          </a:prstGeom>
-          <a:ln w="12700">
-            <a:solidFill>
-              <a:srgbClr val="C00000"/>
-            </a:solidFill>
-            <a:prstDash val="solid"/>
-            <a:headEnd type="none" w="med" len="med"/>
-            <a:tailEnd type="triangle" w="med" len="med"/>
-          </a:ln>
-        </p:spPr>
-        <p:style>
-          <a:lnRef idx="1">
-            <a:schemeClr val="accent1"/>
-          </a:lnRef>
-          <a:fillRef idx="0">
-            <a:schemeClr val="accent1"/>
-          </a:fillRef>
-          <a:effectRef idx="0">
-            <a:schemeClr val="accent1"/>
-          </a:effectRef>
-          <a:fontRef idx="minor">
-            <a:schemeClr val="tx1"/>
-          </a:fontRef>
-        </p:style>
-      </p:cxnSp>
-      <p:sp>
-        <p:nvSpPr>
-          <p:cNvPr id="154" name="TextBox 153">
-            <a:extLst>
-              <a:ext uri="{FF2B5EF4-FFF2-40B4-BE49-F238E27FC236}">
-                <a16:creationId xmlns:a16="http://schemas.microsoft.com/office/drawing/2014/main" id="{1A5143B2-BD61-EB44-2453-ECFC93EDC2F1}"/>
-              </a:ext>
-            </a:extLst>
-          </p:cNvPr>
-          <p:cNvSpPr txBox="1"/>
-          <p:nvPr/>
-        </p:nvSpPr>
-        <p:spPr>
-          <a:xfrm>
-            <a:off x="6792048" y="2869791"/>
-            <a:ext cx="702455" cy="230832"/>
-          </a:xfrm>
-          <a:prstGeom prst="rect">
-            <a:avLst/>
-          </a:prstGeom>
-          <a:noFill/>
-        </p:spPr>
-        <p:txBody>
-          <a:bodyPr wrap="square" rtlCol="0">
-            <a:spAutoFit/>
-          </a:bodyPr>
-          <a:lstStyle/>
-          <a:p>
-            <a:r>
-              <a:rPr lang="en-US" sz="900"/>
-              <a:t>Traffic</a:t>
-            </a:r>
-            <a:endParaRPr lang="en-KR" sz="900"/>
-          </a:p>
-        </p:txBody>
-      </p:sp>
       <p:sp>
         <p:nvSpPr>
           <p:cNvPr id="155" name="사각형: 둥근 모서리 70">
@@ -56244,88 +56188,6 @@
               <a:t>Pod</a:t>
             </a:r>
             <a:endParaRPr lang="ko-KR" altLang="en-US" sz="900" b="1" dirty="0"/>
-          </a:p>
-        </p:txBody>
-      </p:sp>
-      <p:cxnSp>
-        <p:nvCxnSpPr>
-          <p:cNvPr id="168" name="직선 화살표 연결선 96">
-            <a:extLst>
-              <a:ext uri="{FF2B5EF4-FFF2-40B4-BE49-F238E27FC236}">
-                <a16:creationId xmlns:a16="http://schemas.microsoft.com/office/drawing/2014/main" id="{E28BA672-D4B9-0C01-7E5C-CF1C728AEE9E}"/>
-              </a:ext>
-            </a:extLst>
-          </p:cNvPr>
-          <p:cNvCxnSpPr>
-            <a:cxnSpLocks/>
-          </p:cNvCxnSpPr>
-          <p:nvPr/>
-        </p:nvCxnSpPr>
-        <p:spPr>
-          <a:xfrm>
-            <a:off x="6496305" y="3228227"/>
-            <a:ext cx="323569" cy="0"/>
-          </a:xfrm>
-          <a:prstGeom prst="straightConnector1">
-            <a:avLst/>
-          </a:prstGeom>
-          <a:ln w="12700">
-            <a:solidFill>
-              <a:schemeClr val="accent3"/>
-            </a:solidFill>
-            <a:prstDash val="solid"/>
-            <a:headEnd type="none" w="med" len="med"/>
-            <a:tailEnd type="triangle" w="med" len="med"/>
-          </a:ln>
-        </p:spPr>
-        <p:style>
-          <a:lnRef idx="1">
-            <a:schemeClr val="accent1"/>
-          </a:lnRef>
-          <a:fillRef idx="0">
-            <a:schemeClr val="accent1"/>
-          </a:fillRef>
-          <a:effectRef idx="0">
-            <a:schemeClr val="accent1"/>
-          </a:effectRef>
-          <a:fontRef idx="minor">
-            <a:schemeClr val="tx1"/>
-          </a:fontRef>
-        </p:style>
-      </p:cxnSp>
-      <p:sp>
-        <p:nvSpPr>
-          <p:cNvPr id="169" name="TextBox 168">
-            <a:extLst>
-              <a:ext uri="{FF2B5EF4-FFF2-40B4-BE49-F238E27FC236}">
-                <a16:creationId xmlns:a16="http://schemas.microsoft.com/office/drawing/2014/main" id="{0FCD8552-5E4E-FAD1-6544-FE116B36A557}"/>
-              </a:ext>
-            </a:extLst>
-          </p:cNvPr>
-          <p:cNvSpPr txBox="1"/>
-          <p:nvPr/>
-        </p:nvSpPr>
-        <p:spPr>
-          <a:xfrm>
-            <a:off x="6792048" y="3118457"/>
-            <a:ext cx="702455" cy="230832"/>
-          </a:xfrm>
-          <a:prstGeom prst="rect">
-            <a:avLst/>
-          </a:prstGeom>
-          <a:noFill/>
-        </p:spPr>
-        <p:txBody>
-          <a:bodyPr wrap="square" rtlCol="0">
-            <a:spAutoFit/>
-          </a:bodyPr>
-          <a:lstStyle/>
-          <a:p>
-            <a:r>
-              <a:rPr lang="en-US" sz="900"/>
-              <a:t>Create</a:t>
-            </a:r>
-            <a:endParaRPr lang="en-KR" sz="900"/>
           </a:p>
         </p:txBody>
       </p:sp>
@@ -56778,6 +56640,252 @@
           </a:fontRef>
         </p:style>
       </p:cxnSp>
+      <p:cxnSp>
+        <p:nvCxnSpPr>
+          <p:cNvPr id="9" name="직선 화살표 연결선 96">
+            <a:extLst>
+              <a:ext uri="{FF2B5EF4-FFF2-40B4-BE49-F238E27FC236}">
+                <a16:creationId xmlns:a16="http://schemas.microsoft.com/office/drawing/2014/main" id="{D7F1D4F8-D5C6-698D-D7EB-706AB226BE50}"/>
+              </a:ext>
+            </a:extLst>
+          </p:cNvPr>
+          <p:cNvCxnSpPr>
+            <a:cxnSpLocks/>
+          </p:cNvCxnSpPr>
+          <p:nvPr/>
+        </p:nvCxnSpPr>
+        <p:spPr>
+          <a:xfrm>
+            <a:off x="6496305" y="3278557"/>
+            <a:ext cx="323569" cy="0"/>
+          </a:xfrm>
+          <a:prstGeom prst="straightConnector1">
+            <a:avLst/>
+          </a:prstGeom>
+          <a:ln w="12700">
+            <a:solidFill>
+              <a:schemeClr val="tx1"/>
+            </a:solidFill>
+            <a:prstDash val="solid"/>
+            <a:headEnd type="none" w="med" len="med"/>
+            <a:tailEnd type="triangle" w="med" len="med"/>
+          </a:ln>
+        </p:spPr>
+        <p:style>
+          <a:lnRef idx="1">
+            <a:schemeClr val="accent1"/>
+          </a:lnRef>
+          <a:fillRef idx="0">
+            <a:schemeClr val="accent1"/>
+          </a:fillRef>
+          <a:effectRef idx="0">
+            <a:schemeClr val="accent1"/>
+          </a:effectRef>
+          <a:fontRef idx="minor">
+            <a:schemeClr val="tx1"/>
+          </a:fontRef>
+        </p:style>
+      </p:cxnSp>
+      <p:sp>
+        <p:nvSpPr>
+          <p:cNvPr id="10" name="TextBox 9">
+            <a:extLst>
+              <a:ext uri="{FF2B5EF4-FFF2-40B4-BE49-F238E27FC236}">
+                <a16:creationId xmlns:a16="http://schemas.microsoft.com/office/drawing/2014/main" id="{1218913A-C9D0-9E87-B054-6B09496A63EB}"/>
+              </a:ext>
+            </a:extLst>
+          </p:cNvPr>
+          <p:cNvSpPr txBox="1"/>
+          <p:nvPr/>
+        </p:nvSpPr>
+        <p:spPr>
+          <a:xfrm>
+            <a:off x="6792048" y="3168787"/>
+            <a:ext cx="702455" cy="230832"/>
+          </a:xfrm>
+          <a:prstGeom prst="rect">
+            <a:avLst/>
+          </a:prstGeom>
+          <a:noFill/>
+        </p:spPr>
+        <p:txBody>
+          <a:bodyPr wrap="square" rtlCol="0">
+            <a:spAutoFit/>
+          </a:bodyPr>
+          <a:lstStyle/>
+          <a:p>
+            <a:r>
+              <a:rPr lang="en-US" altLang="ko-KR" sz="900"/>
+              <a:t>Reference</a:t>
+            </a:r>
+            <a:endParaRPr lang="en-KR" sz="900"/>
+          </a:p>
+        </p:txBody>
+      </p:sp>
+      <p:cxnSp>
+        <p:nvCxnSpPr>
+          <p:cNvPr id="11" name="직선 화살표 연결선 96">
+            <a:extLst>
+              <a:ext uri="{FF2B5EF4-FFF2-40B4-BE49-F238E27FC236}">
+                <a16:creationId xmlns:a16="http://schemas.microsoft.com/office/drawing/2014/main" id="{CD6E1DD8-DDAC-C51B-DA5A-68FE307668E4}"/>
+              </a:ext>
+            </a:extLst>
+          </p:cNvPr>
+          <p:cNvCxnSpPr>
+            <a:cxnSpLocks/>
+          </p:cNvCxnSpPr>
+          <p:nvPr/>
+        </p:nvCxnSpPr>
+        <p:spPr>
+          <a:xfrm>
+            <a:off x="6496305" y="3525197"/>
+            <a:ext cx="323569" cy="0"/>
+          </a:xfrm>
+          <a:prstGeom prst="straightConnector1">
+            <a:avLst/>
+          </a:prstGeom>
+          <a:ln w="12700">
+            <a:solidFill>
+              <a:srgbClr val="C00000"/>
+            </a:solidFill>
+            <a:prstDash val="solid"/>
+            <a:headEnd type="none" w="med" len="med"/>
+            <a:tailEnd type="triangle" w="med" len="med"/>
+          </a:ln>
+        </p:spPr>
+        <p:style>
+          <a:lnRef idx="1">
+            <a:schemeClr val="accent1"/>
+          </a:lnRef>
+          <a:fillRef idx="0">
+            <a:schemeClr val="accent1"/>
+          </a:fillRef>
+          <a:effectRef idx="0">
+            <a:schemeClr val="accent1"/>
+          </a:effectRef>
+          <a:fontRef idx="minor">
+            <a:schemeClr val="tx1"/>
+          </a:fontRef>
+        </p:style>
+      </p:cxnSp>
+      <p:sp>
+        <p:nvSpPr>
+          <p:cNvPr id="12" name="TextBox 11">
+            <a:extLst>
+              <a:ext uri="{FF2B5EF4-FFF2-40B4-BE49-F238E27FC236}">
+                <a16:creationId xmlns:a16="http://schemas.microsoft.com/office/drawing/2014/main" id="{3D77D160-DD5B-133E-9E7C-9D1900C7DA7A}"/>
+              </a:ext>
+            </a:extLst>
+          </p:cNvPr>
+          <p:cNvSpPr txBox="1"/>
+          <p:nvPr/>
+        </p:nvSpPr>
+        <p:spPr>
+          <a:xfrm>
+            <a:off x="6792048" y="3415427"/>
+            <a:ext cx="702455" cy="230832"/>
+          </a:xfrm>
+          <a:prstGeom prst="rect">
+            <a:avLst/>
+          </a:prstGeom>
+          <a:noFill/>
+        </p:spPr>
+        <p:txBody>
+          <a:bodyPr wrap="square" rtlCol="0">
+            <a:spAutoFit/>
+          </a:bodyPr>
+          <a:lstStyle/>
+          <a:p>
+            <a:r>
+              <a:rPr lang="en-US" sz="900"/>
+              <a:t>Traffic</a:t>
+            </a:r>
+            <a:endParaRPr lang="en-KR" sz="900"/>
+          </a:p>
+        </p:txBody>
+      </p:sp>
+      <p:cxnSp>
+        <p:nvCxnSpPr>
+          <p:cNvPr id="14" name="직선 화살표 연결선 96">
+            <a:extLst>
+              <a:ext uri="{FF2B5EF4-FFF2-40B4-BE49-F238E27FC236}">
+                <a16:creationId xmlns:a16="http://schemas.microsoft.com/office/drawing/2014/main" id="{D0B2F4A5-3233-FE77-4B09-E56FBD9817D7}"/>
+              </a:ext>
+            </a:extLst>
+          </p:cNvPr>
+          <p:cNvCxnSpPr>
+            <a:cxnSpLocks/>
+          </p:cNvCxnSpPr>
+          <p:nvPr/>
+        </p:nvCxnSpPr>
+        <p:spPr>
+          <a:xfrm>
+            <a:off x="6496305" y="3773863"/>
+            <a:ext cx="323569" cy="0"/>
+          </a:xfrm>
+          <a:prstGeom prst="straightConnector1">
+            <a:avLst/>
+          </a:prstGeom>
+          <a:ln w="12700">
+            <a:solidFill>
+              <a:schemeClr val="accent3"/>
+            </a:solidFill>
+            <a:prstDash val="solid"/>
+            <a:headEnd type="none" w="med" len="med"/>
+            <a:tailEnd type="triangle" w="med" len="med"/>
+          </a:ln>
+        </p:spPr>
+        <p:style>
+          <a:lnRef idx="1">
+            <a:schemeClr val="accent1"/>
+          </a:lnRef>
+          <a:fillRef idx="0">
+            <a:schemeClr val="accent1"/>
+          </a:fillRef>
+          <a:effectRef idx="0">
+            <a:schemeClr val="accent1"/>
+          </a:effectRef>
+          <a:fontRef idx="minor">
+            <a:schemeClr val="tx1"/>
+          </a:fontRef>
+        </p:style>
+      </p:cxnSp>
+      <p:sp>
+        <p:nvSpPr>
+          <p:cNvPr id="16" name="TextBox 15">
+            <a:extLst>
+              <a:ext uri="{FF2B5EF4-FFF2-40B4-BE49-F238E27FC236}">
+                <a16:creationId xmlns:a16="http://schemas.microsoft.com/office/drawing/2014/main" id="{B1C53AA9-FD5E-706C-6609-EEDC42D2FB6E}"/>
+              </a:ext>
+            </a:extLst>
+          </p:cNvPr>
+          <p:cNvSpPr txBox="1"/>
+          <p:nvPr/>
+        </p:nvSpPr>
+        <p:spPr>
+          <a:xfrm>
+            <a:off x="6792048" y="3664093"/>
+            <a:ext cx="702455" cy="230832"/>
+          </a:xfrm>
+          <a:prstGeom prst="rect">
+            <a:avLst/>
+          </a:prstGeom>
+          <a:noFill/>
+        </p:spPr>
+        <p:txBody>
+          <a:bodyPr wrap="square" rtlCol="0">
+            <a:spAutoFit/>
+          </a:bodyPr>
+          <a:lstStyle/>
+          <a:p>
+            <a:r>
+              <a:rPr lang="en-US" sz="900"/>
+              <a:t>Create</a:t>
+            </a:r>
+            <a:endParaRPr lang="en-KR" sz="900"/>
+          </a:p>
+        </p:txBody>
+      </p:sp>
     </p:spTree>
     <p:extLst>
       <p:ext uri="{BB962C8B-B14F-4D97-AF65-F5344CB8AC3E}">
